--- a/Material_de_Treino/DevSecOps_tecnico.pptx
+++ b/Material_de_Treino/DevSecOps_tecnico.pptx
@@ -130,13 +130,304 @@
 <file path=ppt/revisionInfo.xml><?xml version="1.0" encoding="utf-8"?>
 <p1510:revInfo xmlns:a="http://schemas.openxmlformats.org/drawingml/2006/main" xmlns:r="http://schemas.openxmlformats.org/officeDocument/2006/relationships" xmlns:p1510="http://schemas.microsoft.com/office/powerpoint/2015/10/main">
   <p1510:revLst>
-    <p1510:client id="{C10E5838-48E7-69F5-0991-9833C58C8B39}" v="2395" dt="2025-07-02T20:15:37.897"/>
+    <p1510:client id="{205D96A5-4420-5B60-A853-996376089633}" v="290" dt="2025-07-06T19:01:56.804"/>
   </p1510:revLst>
 </p1510:revInfo>
 </file>
 
 <file path=ppt/changesInfos/changesInfo1.xml><?xml version="1.0" encoding="utf-8"?>
 <pc:chgInfo xmlns:a="http://schemas.openxmlformats.org/drawingml/2006/main" xmlns:r="http://schemas.openxmlformats.org/officeDocument/2006/relationships" xmlns:ac="http://schemas.microsoft.com/office/drawing/2013/main/command" xmlns:pc="http://schemas.microsoft.com/office/powerpoint/2013/main/command">
+  <pc:docChgLst>
+    <pc:chgData name="Raquel Dos Santos Silva" userId="S::1242205@isep.ipp.pt::8ae1d8f1-1968-441a-92f3-17e17a526773" providerId="AD" clId="Web-{205D96A5-4420-5B60-A853-996376089633}"/>
+    <pc:docChg chg="modSld">
+      <pc:chgData name="Raquel Dos Santos Silva" userId="S::1242205@isep.ipp.pt::8ae1d8f1-1968-441a-92f3-17e17a526773" providerId="AD" clId="Web-{205D96A5-4420-5B60-A853-996376089633}" dt="2025-07-06T19:01:56.804" v="272" actId="20577"/>
+      <pc:docMkLst>
+        <pc:docMk/>
+      </pc:docMkLst>
+      <pc:sldChg chg="modSp">
+        <pc:chgData name="Raquel Dos Santos Silva" userId="S::1242205@isep.ipp.pt::8ae1d8f1-1968-441a-92f3-17e17a526773" providerId="AD" clId="Web-{205D96A5-4420-5B60-A853-996376089633}" dt="2025-07-06T19:00:49.849" v="253" actId="20577"/>
+        <pc:sldMkLst>
+          <pc:docMk/>
+          <pc:sldMk cId="109857222" sldId="256"/>
+        </pc:sldMkLst>
+        <pc:spChg chg="mod">
+          <ac:chgData name="Raquel Dos Santos Silva" userId="S::1242205@isep.ipp.pt::8ae1d8f1-1968-441a-92f3-17e17a526773" providerId="AD" clId="Web-{205D96A5-4420-5B60-A853-996376089633}" dt="2025-07-06T19:00:49.849" v="253" actId="20577"/>
+          <ac:spMkLst>
+            <pc:docMk/>
+            <pc:sldMk cId="109857222" sldId="256"/>
+            <ac:spMk id="3" creationId="{00000000-0000-0000-0000-000000000000}"/>
+          </ac:spMkLst>
+        </pc:spChg>
+      </pc:sldChg>
+      <pc:sldChg chg="modSp">
+        <pc:chgData name="Raquel Dos Santos Silva" userId="S::1242205@isep.ipp.pt::8ae1d8f1-1968-441a-92f3-17e17a526773" providerId="AD" clId="Web-{205D96A5-4420-5B60-A853-996376089633}" dt="2025-07-06T18:45:47.385" v="17" actId="20577"/>
+        <pc:sldMkLst>
+          <pc:docMk/>
+          <pc:sldMk cId="3209257658" sldId="257"/>
+        </pc:sldMkLst>
+        <pc:spChg chg="mod">
+          <ac:chgData name="Raquel Dos Santos Silva" userId="S::1242205@isep.ipp.pt::8ae1d8f1-1968-441a-92f3-17e17a526773" providerId="AD" clId="Web-{205D96A5-4420-5B60-A853-996376089633}" dt="2025-07-06T18:45:47.385" v="17" actId="20577"/>
+          <ac:spMkLst>
+            <pc:docMk/>
+            <pc:sldMk cId="3209257658" sldId="257"/>
+            <ac:spMk id="3" creationId="{36075547-0C4A-C80B-781E-54C9AAA39A9D}"/>
+          </ac:spMkLst>
+        </pc:spChg>
+      </pc:sldChg>
+      <pc:sldChg chg="modSp">
+        <pc:chgData name="Raquel Dos Santos Silva" userId="S::1242205@isep.ipp.pt::8ae1d8f1-1968-441a-92f3-17e17a526773" providerId="AD" clId="Web-{205D96A5-4420-5B60-A853-996376089633}" dt="2025-07-06T18:46:07.903" v="26" actId="20577"/>
+        <pc:sldMkLst>
+          <pc:docMk/>
+          <pc:sldMk cId="2792781745" sldId="258"/>
+        </pc:sldMkLst>
+        <pc:spChg chg="mod">
+          <ac:chgData name="Raquel Dos Santos Silva" userId="S::1242205@isep.ipp.pt::8ae1d8f1-1968-441a-92f3-17e17a526773" providerId="AD" clId="Web-{205D96A5-4420-5B60-A853-996376089633}" dt="2025-07-06T18:46:07.903" v="26" actId="20577"/>
+          <ac:spMkLst>
+            <pc:docMk/>
+            <pc:sldMk cId="2792781745" sldId="258"/>
+            <ac:spMk id="2" creationId="{F67BFA14-A75C-D9FD-188D-24C8FDFD684B}"/>
+          </ac:spMkLst>
+        </pc:spChg>
+        <pc:spChg chg="mod">
+          <ac:chgData name="Raquel Dos Santos Silva" userId="S::1242205@isep.ipp.pt::8ae1d8f1-1968-441a-92f3-17e17a526773" providerId="AD" clId="Web-{205D96A5-4420-5B60-A853-996376089633}" dt="2025-07-06T18:45:59.793" v="23" actId="20577"/>
+          <ac:spMkLst>
+            <pc:docMk/>
+            <pc:sldMk cId="2792781745" sldId="258"/>
+            <ac:spMk id="3" creationId="{25092A66-04B2-51D2-DD74-0BCF94E04CA7}"/>
+          </ac:spMkLst>
+        </pc:spChg>
+      </pc:sldChg>
+      <pc:sldChg chg="modSp">
+        <pc:chgData name="Raquel Dos Santos Silva" userId="S::1242205@isep.ipp.pt::8ae1d8f1-1968-441a-92f3-17e17a526773" providerId="AD" clId="Web-{205D96A5-4420-5B60-A853-996376089633}" dt="2025-07-06T19:01:56.804" v="272" actId="20577"/>
+        <pc:sldMkLst>
+          <pc:docMk/>
+          <pc:sldMk cId="3409651929" sldId="259"/>
+        </pc:sldMkLst>
+        <pc:spChg chg="mod">
+          <ac:chgData name="Raquel Dos Santos Silva" userId="S::1242205@isep.ipp.pt::8ae1d8f1-1968-441a-92f3-17e17a526773" providerId="AD" clId="Web-{205D96A5-4420-5B60-A853-996376089633}" dt="2025-07-06T18:46:17.325" v="28" actId="20577"/>
+          <ac:spMkLst>
+            <pc:docMk/>
+            <pc:sldMk cId="3409651929" sldId="259"/>
+            <ac:spMk id="2" creationId="{9180F38A-A5BE-76D8-1CE4-CD76AEE325FA}"/>
+          </ac:spMkLst>
+        </pc:spChg>
+        <pc:spChg chg="mod">
+          <ac:chgData name="Raquel Dos Santos Silva" userId="S::1242205@isep.ipp.pt::8ae1d8f1-1968-441a-92f3-17e17a526773" providerId="AD" clId="Web-{205D96A5-4420-5B60-A853-996376089633}" dt="2025-07-06T19:01:56.804" v="272" actId="20577"/>
+          <ac:spMkLst>
+            <pc:docMk/>
+            <pc:sldMk cId="3409651929" sldId="259"/>
+            <ac:spMk id="3" creationId="{E710BBF4-2EE9-81AF-C1C1-9CFD64F8B687}"/>
+          </ac:spMkLst>
+        </pc:spChg>
+      </pc:sldChg>
+      <pc:sldChg chg="modSp">
+        <pc:chgData name="Raquel Dos Santos Silva" userId="S::1242205@isep.ipp.pt::8ae1d8f1-1968-441a-92f3-17e17a526773" providerId="AD" clId="Web-{205D96A5-4420-5B60-A853-996376089633}" dt="2025-07-06T18:50:16.849" v="55" actId="20577"/>
+        <pc:sldMkLst>
+          <pc:docMk/>
+          <pc:sldMk cId="3224556504" sldId="260"/>
+        </pc:sldMkLst>
+        <pc:spChg chg="mod">
+          <ac:chgData name="Raquel Dos Santos Silva" userId="S::1242205@isep.ipp.pt::8ae1d8f1-1968-441a-92f3-17e17a526773" providerId="AD" clId="Web-{205D96A5-4420-5B60-A853-996376089633}" dt="2025-07-06T18:48:37.752" v="30" actId="20577"/>
+          <ac:spMkLst>
+            <pc:docMk/>
+            <pc:sldMk cId="3224556504" sldId="260"/>
+            <ac:spMk id="2" creationId="{92097F3D-5B06-AC0E-9CA7-94557C1C6B00}"/>
+          </ac:spMkLst>
+        </pc:spChg>
+        <pc:spChg chg="mod">
+          <ac:chgData name="Raquel Dos Santos Silva" userId="S::1242205@isep.ipp.pt::8ae1d8f1-1968-441a-92f3-17e17a526773" providerId="AD" clId="Web-{205D96A5-4420-5B60-A853-996376089633}" dt="2025-07-06T18:50:16.849" v="55" actId="20577"/>
+          <ac:spMkLst>
+            <pc:docMk/>
+            <pc:sldMk cId="3224556504" sldId="260"/>
+            <ac:spMk id="3" creationId="{7B7DB22D-0DED-9511-8D16-01CA55990E58}"/>
+          </ac:spMkLst>
+        </pc:spChg>
+      </pc:sldChg>
+      <pc:sldChg chg="modSp">
+        <pc:chgData name="Raquel Dos Santos Silva" userId="S::1242205@isep.ipp.pt::8ae1d8f1-1968-441a-92f3-17e17a526773" providerId="AD" clId="Web-{205D96A5-4420-5B60-A853-996376089633}" dt="2025-07-06T18:51:25.931" v="71" actId="20577"/>
+        <pc:sldMkLst>
+          <pc:docMk/>
+          <pc:sldMk cId="3142556595" sldId="261"/>
+        </pc:sldMkLst>
+        <pc:spChg chg="mod">
+          <ac:chgData name="Raquel Dos Santos Silva" userId="S::1242205@isep.ipp.pt::8ae1d8f1-1968-441a-92f3-17e17a526773" providerId="AD" clId="Web-{205D96A5-4420-5B60-A853-996376089633}" dt="2025-07-06T18:51:25.931" v="71" actId="20577"/>
+          <ac:spMkLst>
+            <pc:docMk/>
+            <pc:sldMk cId="3142556595" sldId="261"/>
+            <ac:spMk id="2" creationId="{91962151-A88E-C721-D89E-ADF55497B811}"/>
+          </ac:spMkLst>
+        </pc:spChg>
+        <pc:spChg chg="mod">
+          <ac:chgData name="Raquel Dos Santos Silva" userId="S::1242205@isep.ipp.pt::8ae1d8f1-1968-441a-92f3-17e17a526773" providerId="AD" clId="Web-{205D96A5-4420-5B60-A853-996376089633}" dt="2025-07-06T18:51:22.556" v="68" actId="20577"/>
+          <ac:spMkLst>
+            <pc:docMk/>
+            <pc:sldMk cId="3142556595" sldId="261"/>
+            <ac:spMk id="3" creationId="{A4833A77-AD79-777A-9B2D-CDF7E4BB366A}"/>
+          </ac:spMkLst>
+        </pc:spChg>
+      </pc:sldChg>
+      <pc:sldChg chg="modSp">
+        <pc:chgData name="Raquel Dos Santos Silva" userId="S::1242205@isep.ipp.pt::8ae1d8f1-1968-441a-92f3-17e17a526773" providerId="AD" clId="Web-{205D96A5-4420-5B60-A853-996376089633}" dt="2025-07-06T18:53:32.998" v="115" actId="20577"/>
+        <pc:sldMkLst>
+          <pc:docMk/>
+          <pc:sldMk cId="1554750443" sldId="262"/>
+        </pc:sldMkLst>
+        <pc:spChg chg="mod">
+          <ac:chgData name="Raquel Dos Santos Silva" userId="S::1242205@isep.ipp.pt::8ae1d8f1-1968-441a-92f3-17e17a526773" providerId="AD" clId="Web-{205D96A5-4420-5B60-A853-996376089633}" dt="2025-07-06T18:51:32.369" v="73" actId="20577"/>
+          <ac:spMkLst>
+            <pc:docMk/>
+            <pc:sldMk cId="1554750443" sldId="262"/>
+            <ac:spMk id="2" creationId="{F4912CFA-1402-0158-A7BC-B059D1634650}"/>
+          </ac:spMkLst>
+        </pc:spChg>
+        <pc:spChg chg="mod">
+          <ac:chgData name="Raquel Dos Santos Silva" userId="S::1242205@isep.ipp.pt::8ae1d8f1-1968-441a-92f3-17e17a526773" providerId="AD" clId="Web-{205D96A5-4420-5B60-A853-996376089633}" dt="2025-07-06T18:53:32.998" v="115" actId="20577"/>
+          <ac:spMkLst>
+            <pc:docMk/>
+            <pc:sldMk cId="1554750443" sldId="262"/>
+            <ac:spMk id="3" creationId="{9ABFC60B-E8CE-C554-F230-AFD34D3F421A}"/>
+          </ac:spMkLst>
+        </pc:spChg>
+      </pc:sldChg>
+      <pc:sldChg chg="modSp">
+        <pc:chgData name="Raquel Dos Santos Silva" userId="S::1242205@isep.ipp.pt::8ae1d8f1-1968-441a-92f3-17e17a526773" providerId="AD" clId="Web-{205D96A5-4420-5B60-A853-996376089633}" dt="2025-07-06T18:55:51.722" v="134" actId="20577"/>
+        <pc:sldMkLst>
+          <pc:docMk/>
+          <pc:sldMk cId="856971220" sldId="263"/>
+        </pc:sldMkLst>
+        <pc:spChg chg="mod">
+          <ac:chgData name="Raquel Dos Santos Silva" userId="S::1242205@isep.ipp.pt::8ae1d8f1-1968-441a-92f3-17e17a526773" providerId="AD" clId="Web-{205D96A5-4420-5B60-A853-996376089633}" dt="2025-07-06T18:53:41.608" v="118" actId="20577"/>
+          <ac:spMkLst>
+            <pc:docMk/>
+            <pc:sldMk cId="856971220" sldId="263"/>
+            <ac:spMk id="2" creationId="{479A3416-1680-857C-FC1E-203B14A24474}"/>
+          </ac:spMkLst>
+        </pc:spChg>
+        <pc:spChg chg="mod">
+          <ac:chgData name="Raquel Dos Santos Silva" userId="S::1242205@isep.ipp.pt::8ae1d8f1-1968-441a-92f3-17e17a526773" providerId="AD" clId="Web-{205D96A5-4420-5B60-A853-996376089633}" dt="2025-07-06T18:55:51.722" v="134" actId="20577"/>
+          <ac:spMkLst>
+            <pc:docMk/>
+            <pc:sldMk cId="856971220" sldId="263"/>
+            <ac:spMk id="3" creationId="{61874B59-060C-49F9-79C8-D94B8B1E8B76}"/>
+          </ac:spMkLst>
+        </pc:spChg>
+      </pc:sldChg>
+      <pc:sldChg chg="modSp">
+        <pc:chgData name="Raquel Dos Santos Silva" userId="S::1242205@isep.ipp.pt::8ae1d8f1-1968-441a-92f3-17e17a526773" providerId="AD" clId="Web-{205D96A5-4420-5B60-A853-996376089633}" dt="2025-07-06T18:56:52.965" v="162" actId="20577"/>
+        <pc:sldMkLst>
+          <pc:docMk/>
+          <pc:sldMk cId="1607072836" sldId="264"/>
+        </pc:sldMkLst>
+        <pc:spChg chg="mod">
+          <ac:chgData name="Raquel Dos Santos Silva" userId="S::1242205@isep.ipp.pt::8ae1d8f1-1968-441a-92f3-17e17a526773" providerId="AD" clId="Web-{205D96A5-4420-5B60-A853-996376089633}" dt="2025-07-06T18:56:03.769" v="137" actId="20577"/>
+          <ac:spMkLst>
+            <pc:docMk/>
+            <pc:sldMk cId="1607072836" sldId="264"/>
+            <ac:spMk id="2" creationId="{808228EE-9E44-ADE5-CC10-0370A29A6B28}"/>
+          </ac:spMkLst>
+        </pc:spChg>
+        <pc:spChg chg="mod">
+          <ac:chgData name="Raquel Dos Santos Silva" userId="S::1242205@isep.ipp.pt::8ae1d8f1-1968-441a-92f3-17e17a526773" providerId="AD" clId="Web-{205D96A5-4420-5B60-A853-996376089633}" dt="2025-07-06T18:56:52.965" v="162" actId="20577"/>
+          <ac:spMkLst>
+            <pc:docMk/>
+            <pc:sldMk cId="1607072836" sldId="264"/>
+            <ac:spMk id="3" creationId="{57AD15C6-C4B3-48D0-9FE1-3D81FECAC321}"/>
+          </ac:spMkLst>
+        </pc:spChg>
+      </pc:sldChg>
+      <pc:sldChg chg="modSp">
+        <pc:chgData name="Raquel Dos Santos Silva" userId="S::1242205@isep.ipp.pt::8ae1d8f1-1968-441a-92f3-17e17a526773" providerId="AD" clId="Web-{205D96A5-4420-5B60-A853-996376089633}" dt="2025-07-06T18:58:00.639" v="188" actId="20577"/>
+        <pc:sldMkLst>
+          <pc:docMk/>
+          <pc:sldMk cId="2254297505" sldId="265"/>
+        </pc:sldMkLst>
+        <pc:spChg chg="mod">
+          <ac:chgData name="Raquel Dos Santos Silva" userId="S::1242205@isep.ipp.pt::8ae1d8f1-1968-441a-92f3-17e17a526773" providerId="AD" clId="Web-{205D96A5-4420-5B60-A853-996376089633}" dt="2025-07-06T18:57:09.371" v="170" actId="20577"/>
+          <ac:spMkLst>
+            <pc:docMk/>
+            <pc:sldMk cId="2254297505" sldId="265"/>
+            <ac:spMk id="2" creationId="{DB4926B8-F69C-F063-5F09-A0963E49F376}"/>
+          </ac:spMkLst>
+        </pc:spChg>
+        <pc:spChg chg="mod">
+          <ac:chgData name="Raquel Dos Santos Silva" userId="S::1242205@isep.ipp.pt::8ae1d8f1-1968-441a-92f3-17e17a526773" providerId="AD" clId="Web-{205D96A5-4420-5B60-A853-996376089633}" dt="2025-07-06T18:58:00.639" v="188" actId="20577"/>
+          <ac:spMkLst>
+            <pc:docMk/>
+            <pc:sldMk cId="2254297505" sldId="265"/>
+            <ac:spMk id="3" creationId="{74560B13-3C83-AE7D-59E8-EC2028B4FB6E}"/>
+          </ac:spMkLst>
+        </pc:spChg>
+      </pc:sldChg>
+      <pc:sldChg chg="modSp">
+        <pc:chgData name="Raquel Dos Santos Silva" userId="S::1242205@isep.ipp.pt::8ae1d8f1-1968-441a-92f3-17e17a526773" providerId="AD" clId="Web-{205D96A5-4420-5B60-A853-996376089633}" dt="2025-07-06T18:59:43.862" v="232" actId="20577"/>
+        <pc:sldMkLst>
+          <pc:docMk/>
+          <pc:sldMk cId="1316912185" sldId="267"/>
+        </pc:sldMkLst>
+        <pc:spChg chg="mod">
+          <ac:chgData name="Raquel Dos Santos Silva" userId="S::1242205@isep.ipp.pt::8ae1d8f1-1968-441a-92f3-17e17a526773" providerId="AD" clId="Web-{205D96A5-4420-5B60-A853-996376089633}" dt="2025-07-06T18:59:43.862" v="232" actId="20577"/>
+          <ac:spMkLst>
+            <pc:docMk/>
+            <pc:sldMk cId="1316912185" sldId="267"/>
+            <ac:spMk id="3" creationId="{FC123767-A7A5-ADBB-2225-1A032F96B99B}"/>
+          </ac:spMkLst>
+        </pc:spChg>
+      </pc:sldChg>
+      <pc:sldChg chg="modSp">
+        <pc:chgData name="Raquel Dos Santos Silva" userId="S::1242205@isep.ipp.pt::8ae1d8f1-1968-441a-92f3-17e17a526773" providerId="AD" clId="Web-{205D96A5-4420-5B60-A853-996376089633}" dt="2025-07-06T19:00:19.723" v="246" actId="20577"/>
+        <pc:sldMkLst>
+          <pc:docMk/>
+          <pc:sldMk cId="376740797" sldId="268"/>
+        </pc:sldMkLst>
+        <pc:spChg chg="mod">
+          <ac:chgData name="Raquel Dos Santos Silva" userId="S::1242205@isep.ipp.pt::8ae1d8f1-1968-441a-92f3-17e17a526773" providerId="AD" clId="Web-{205D96A5-4420-5B60-A853-996376089633}" dt="2025-07-06T18:59:57.112" v="235" actId="20577"/>
+          <ac:spMkLst>
+            <pc:docMk/>
+            <pc:sldMk cId="376740797" sldId="268"/>
+            <ac:spMk id="2" creationId="{3BAE7913-77D6-4EEC-1DE0-69ADDA9B43E6}"/>
+          </ac:spMkLst>
+        </pc:spChg>
+        <pc:spChg chg="mod">
+          <ac:chgData name="Raquel Dos Santos Silva" userId="S::1242205@isep.ipp.pt::8ae1d8f1-1968-441a-92f3-17e17a526773" providerId="AD" clId="Web-{205D96A5-4420-5B60-A853-996376089633}" dt="2025-07-06T19:00:19.723" v="246" actId="20577"/>
+          <ac:spMkLst>
+            <pc:docMk/>
+            <pc:sldMk cId="376740797" sldId="268"/>
+            <ac:spMk id="3" creationId="{55A6D953-278D-EF4D-F60A-0051529F009F}"/>
+          </ac:spMkLst>
+        </pc:spChg>
+      </pc:sldChg>
+      <pc:sldChg chg="modSp">
+        <pc:chgData name="Raquel Dos Santos Silva" userId="S::1242205@isep.ipp.pt::8ae1d8f1-1968-441a-92f3-17e17a526773" providerId="AD" clId="Web-{205D96A5-4420-5B60-A853-996376089633}" dt="2025-07-06T19:00:26.613" v="248" actId="20577"/>
+        <pc:sldMkLst>
+          <pc:docMk/>
+          <pc:sldMk cId="988637623" sldId="270"/>
+        </pc:sldMkLst>
+        <pc:spChg chg="mod">
+          <ac:chgData name="Raquel Dos Santos Silva" userId="S::1242205@isep.ipp.pt::8ae1d8f1-1968-441a-92f3-17e17a526773" providerId="AD" clId="Web-{205D96A5-4420-5B60-A853-996376089633}" dt="2025-07-06T19:00:26.613" v="248" actId="20577"/>
+          <ac:spMkLst>
+            <pc:docMk/>
+            <pc:sldMk cId="988637623" sldId="270"/>
+            <ac:spMk id="2" creationId="{4EA5A64B-FD99-6976-6BC5-72FB010C3E25}"/>
+          </ac:spMkLst>
+        </pc:spChg>
+      </pc:sldChg>
+      <pc:sldChg chg="modSp">
+        <pc:chgData name="Raquel Dos Santos Silva" userId="S::1242205@isep.ipp.pt::8ae1d8f1-1968-441a-92f3-17e17a526773" providerId="AD" clId="Web-{205D96A5-4420-5B60-A853-996376089633}" dt="2025-07-06T18:46:04.277" v="24" actId="20577"/>
+        <pc:sldMkLst>
+          <pc:docMk/>
+          <pc:sldMk cId="3300176967" sldId="271"/>
+        </pc:sldMkLst>
+        <pc:spChg chg="mod">
+          <ac:chgData name="Raquel Dos Santos Silva" userId="S::1242205@isep.ipp.pt::8ae1d8f1-1968-441a-92f3-17e17a526773" providerId="AD" clId="Web-{205D96A5-4420-5B60-A853-996376089633}" dt="2025-07-06T18:46:04.277" v="24" actId="20577"/>
+          <ac:spMkLst>
+            <pc:docMk/>
+            <pc:sldMk cId="3300176967" sldId="271"/>
+            <ac:spMk id="2" creationId="{8A4C7159-9E88-DAA8-5FB3-3FB0B7A793B5}"/>
+          </ac:spMkLst>
+        </pc:spChg>
+      </pc:sldChg>
+    </pc:docChg>
+  </pc:docChgLst>
   <pc:docChgLst>
     <pc:chgData name="Vitor Domingues Ribeiro" userId="S::1242206@isep.ipp.pt::52a0b6ee-c18d-477f-9954-7fc582fc1887" providerId="AD" clId="Web-{C10E5838-48E7-69F5-0991-9833C58C8B39}"/>
     <pc:docChg chg="addSld modSld">
@@ -487,30 +778,6 @@
           <pc:docMk/>
           <pc:sldMk cId="3300176967" sldId="271"/>
         </pc:sldMkLst>
-        <pc:spChg chg="del">
-          <ac:chgData name="Vitor Domingues Ribeiro" userId="S::1242206@isep.ipp.pt::52a0b6ee-c18d-477f-9954-7fc582fc1887" providerId="AD" clId="Web-{C10E5838-48E7-69F5-0991-9833C58C8B39}" dt="2025-07-02T20:14:35.051" v="2389"/>
-          <ac:spMkLst>
-            <pc:docMk/>
-            <pc:sldMk cId="3300176967" sldId="271"/>
-            <ac:spMk id="3" creationId="{68480896-69F4-5B24-49D9-C3B9B06BA152}"/>
-          </ac:spMkLst>
-        </pc:spChg>
-        <pc:spChg chg="add del mod">
-          <ac:chgData name="Vitor Domingues Ribeiro" userId="S::1242206@isep.ipp.pt::52a0b6ee-c18d-477f-9954-7fc582fc1887" providerId="AD" clId="Web-{C10E5838-48E7-69F5-0991-9833C58C8B39}" dt="2025-07-02T20:14:37.598" v="2390"/>
-          <ac:spMkLst>
-            <pc:docMk/>
-            <pc:sldMk cId="3300176967" sldId="271"/>
-            <ac:spMk id="6" creationId="{0C25D765-7482-CC0A-7644-3650800304F0}"/>
-          </ac:spMkLst>
-        </pc:spChg>
-        <pc:picChg chg="del">
-          <ac:chgData name="Vitor Domingues Ribeiro" userId="S::1242206@isep.ipp.pt::52a0b6ee-c18d-477f-9954-7fc582fc1887" providerId="AD" clId="Web-{C10E5838-48E7-69F5-0991-9833C58C8B39}" dt="2025-07-02T20:14:35.051" v="2388"/>
-          <ac:picMkLst>
-            <pc:docMk/>
-            <pc:sldMk cId="3300176967" sldId="271"/>
-            <ac:picMk id="4" creationId="{03BB9099-32EC-18A3-99A9-94E7A2635975}"/>
-          </ac:picMkLst>
-        </pc:picChg>
         <pc:picChg chg="add mod ord">
           <ac:chgData name="Vitor Domingues Ribeiro" userId="S::1242206@isep.ipp.pt::52a0b6ee-c18d-477f-9954-7fc582fc1887" providerId="AD" clId="Web-{C10E5838-48E7-69F5-0991-9833C58C8B39}" dt="2025-07-02T20:14:49.989" v="2392" actId="1076"/>
           <ac:picMkLst>
@@ -570,7 +837,6 @@
               <a:rPr lang="en-US"/>
               <a:t>Click to edit Master title style</a:t>
             </a:r>
-            <a:endParaRPr lang="en-US" dirty="0"/>
           </a:p>
         </p:txBody>
       </p:sp>
@@ -635,7 +901,6 @@
               <a:rPr lang="en-US"/>
               <a:t>Click to edit Master subtitle style</a:t>
             </a:r>
-            <a:endParaRPr lang="en-US" dirty="0"/>
           </a:p>
         </p:txBody>
       </p:sp>
@@ -656,7 +921,7 @@
           <a:p>
             <a:fld id="{846CE7D5-CF57-46EF-B807-FDD0502418D4}" type="datetimeFigureOut">
               <a:rPr lang="en-US" smtClean="0"/>
-              <a:t>7/2/2025</a:t>
+              <a:t>7/6/2025</a:t>
             </a:fld>
             <a:endParaRPr lang="en-US"/>
           </a:p>
@@ -753,7 +1018,6 @@
               <a:rPr lang="en-US"/>
               <a:t>Click to edit Master title style</a:t>
             </a:r>
-            <a:endParaRPr lang="en-US" dirty="0"/>
           </a:p>
         </p:txBody>
       </p:sp>
@@ -805,7 +1069,6 @@
               <a:rPr lang="en-US"/>
               <a:t>Fifth level</a:t>
             </a:r>
-            <a:endParaRPr lang="en-US" dirty="0"/>
           </a:p>
         </p:txBody>
       </p:sp>
@@ -826,7 +1089,7 @@
           <a:p>
             <a:fld id="{846CE7D5-CF57-46EF-B807-FDD0502418D4}" type="datetimeFigureOut">
               <a:rPr lang="en-US" smtClean="0"/>
-              <a:t>7/2/2025</a:t>
+              <a:t>7/6/2025</a:t>
             </a:fld>
             <a:endParaRPr lang="en-US"/>
           </a:p>
@@ -928,7 +1191,6 @@
               <a:rPr lang="en-US"/>
               <a:t>Click to edit Master title style</a:t>
             </a:r>
-            <a:endParaRPr lang="en-US" dirty="0"/>
           </a:p>
         </p:txBody>
       </p:sp>
@@ -985,7 +1247,6 @@
               <a:rPr lang="en-US"/>
               <a:t>Fifth level</a:t>
             </a:r>
-            <a:endParaRPr lang="en-US" dirty="0"/>
           </a:p>
         </p:txBody>
       </p:sp>
@@ -1006,7 +1267,7 @@
           <a:p>
             <a:fld id="{846CE7D5-CF57-46EF-B807-FDD0502418D4}" type="datetimeFigureOut">
               <a:rPr lang="en-US" smtClean="0"/>
-              <a:t>7/2/2025</a:t>
+              <a:t>7/6/2025</a:t>
             </a:fld>
             <a:endParaRPr lang="en-US"/>
           </a:p>
@@ -1103,7 +1364,6 @@
               <a:rPr lang="en-US"/>
               <a:t>Click to edit Master title style</a:t>
             </a:r>
-            <a:endParaRPr lang="en-US" dirty="0"/>
           </a:p>
         </p:txBody>
       </p:sp>
@@ -1155,7 +1415,6 @@
               <a:rPr lang="en-US"/>
               <a:t>Fifth level</a:t>
             </a:r>
-            <a:endParaRPr lang="en-US" dirty="0"/>
           </a:p>
         </p:txBody>
       </p:sp>
@@ -1176,7 +1435,7 @@
           <a:p>
             <a:fld id="{846CE7D5-CF57-46EF-B807-FDD0502418D4}" type="datetimeFigureOut">
               <a:rPr lang="en-US" smtClean="0"/>
-              <a:t>7/2/2025</a:t>
+              <a:t>7/6/2025</a:t>
             </a:fld>
             <a:endParaRPr lang="en-US"/>
           </a:p>
@@ -1282,7 +1541,6 @@
               <a:rPr lang="en-US"/>
               <a:t>Click to edit Master title style</a:t>
             </a:r>
-            <a:endParaRPr lang="en-US" dirty="0"/>
           </a:p>
         </p:txBody>
       </p:sp>
@@ -1422,7 +1680,7 @@
           <a:p>
             <a:fld id="{846CE7D5-CF57-46EF-B807-FDD0502418D4}" type="datetimeFigureOut">
               <a:rPr lang="en-US" smtClean="0"/>
-              <a:t>7/2/2025</a:t>
+              <a:t>7/6/2025</a:t>
             </a:fld>
             <a:endParaRPr lang="en-US"/>
           </a:p>
@@ -1519,7 +1777,6 @@
               <a:rPr lang="en-US"/>
               <a:t>Click to edit Master title style</a:t>
             </a:r>
-            <a:endParaRPr lang="en-US" dirty="0"/>
           </a:p>
         </p:txBody>
       </p:sp>
@@ -1576,7 +1833,6 @@
               <a:rPr lang="en-US"/>
               <a:t>Fifth level</a:t>
             </a:r>
-            <a:endParaRPr lang="en-US" dirty="0"/>
           </a:p>
         </p:txBody>
       </p:sp>
@@ -1633,7 +1889,6 @@
               <a:rPr lang="en-US"/>
               <a:t>Fifth level</a:t>
             </a:r>
-            <a:endParaRPr lang="en-US" dirty="0"/>
           </a:p>
         </p:txBody>
       </p:sp>
@@ -1654,7 +1909,7 @@
           <a:p>
             <a:fld id="{846CE7D5-CF57-46EF-B807-FDD0502418D4}" type="datetimeFigureOut">
               <a:rPr lang="en-US" smtClean="0"/>
-              <a:t>7/2/2025</a:t>
+              <a:t>7/6/2025</a:t>
             </a:fld>
             <a:endParaRPr lang="en-US"/>
           </a:p>
@@ -1756,7 +2011,6 @@
               <a:rPr lang="en-US"/>
               <a:t>Click to edit Master title style</a:t>
             </a:r>
-            <a:endParaRPr lang="en-US" dirty="0"/>
           </a:p>
         </p:txBody>
       </p:sp>
@@ -1878,7 +2132,6 @@
               <a:rPr lang="en-US"/>
               <a:t>Fifth level</a:t>
             </a:r>
-            <a:endParaRPr lang="en-US" dirty="0"/>
           </a:p>
         </p:txBody>
       </p:sp>
@@ -2000,7 +2253,6 @@
               <a:rPr lang="en-US"/>
               <a:t>Fifth level</a:t>
             </a:r>
-            <a:endParaRPr lang="en-US" dirty="0"/>
           </a:p>
         </p:txBody>
       </p:sp>
@@ -2021,7 +2273,7 @@
           <a:p>
             <a:fld id="{846CE7D5-CF57-46EF-B807-FDD0502418D4}" type="datetimeFigureOut">
               <a:rPr lang="en-US" smtClean="0"/>
-              <a:t>7/2/2025</a:t>
+              <a:t>7/6/2025</a:t>
             </a:fld>
             <a:endParaRPr lang="en-US"/>
           </a:p>
@@ -2118,7 +2370,6 @@
               <a:rPr lang="en-US"/>
               <a:t>Click to edit Master title style</a:t>
             </a:r>
-            <a:endParaRPr lang="en-US" dirty="0"/>
           </a:p>
         </p:txBody>
       </p:sp>
@@ -2139,7 +2390,7 @@
           <a:p>
             <a:fld id="{846CE7D5-CF57-46EF-B807-FDD0502418D4}" type="datetimeFigureOut">
               <a:rPr lang="en-US" smtClean="0"/>
-              <a:t>7/2/2025</a:t>
+              <a:t>7/6/2025</a:t>
             </a:fld>
             <a:endParaRPr lang="en-US"/>
           </a:p>
@@ -2234,7 +2485,7 @@
           <a:p>
             <a:fld id="{846CE7D5-CF57-46EF-B807-FDD0502418D4}" type="datetimeFigureOut">
               <a:rPr lang="en-US" smtClean="0"/>
-              <a:t>7/2/2025</a:t>
+              <a:t>7/6/2025</a:t>
             </a:fld>
             <a:endParaRPr lang="en-US"/>
           </a:p>
@@ -2340,7 +2591,6 @@
               <a:rPr lang="en-US"/>
               <a:t>Click to edit Master title style</a:t>
             </a:r>
-            <a:endParaRPr lang="en-US" dirty="0"/>
           </a:p>
         </p:txBody>
       </p:sp>
@@ -2425,7 +2675,6 @@
               <a:rPr lang="en-US"/>
               <a:t>Fifth level</a:t>
             </a:r>
-            <a:endParaRPr lang="en-US" dirty="0"/>
           </a:p>
         </p:txBody>
       </p:sp>
@@ -2511,7 +2760,7 @@
           <a:p>
             <a:fld id="{846CE7D5-CF57-46EF-B807-FDD0502418D4}" type="datetimeFigureOut">
               <a:rPr lang="en-US" smtClean="0"/>
-              <a:t>7/2/2025</a:t>
+              <a:t>7/6/2025</a:t>
             </a:fld>
             <a:endParaRPr lang="en-US"/>
           </a:p>
@@ -2617,7 +2866,6 @@
               <a:rPr lang="en-US"/>
               <a:t>Click to edit Master title style</a:t>
             </a:r>
-            <a:endParaRPr lang="en-US" dirty="0"/>
           </a:p>
         </p:txBody>
       </p:sp>
@@ -2682,7 +2930,6 @@
               <a:rPr lang="en-US"/>
               <a:t>Click icon to add picture</a:t>
             </a:r>
-            <a:endParaRPr lang="en-US" dirty="0"/>
           </a:p>
         </p:txBody>
       </p:sp>
@@ -2768,7 +3015,7 @@
           <a:p>
             <a:fld id="{846CE7D5-CF57-46EF-B807-FDD0502418D4}" type="datetimeFigureOut">
               <a:rPr lang="en-US" smtClean="0"/>
-              <a:t>7/2/2025</a:t>
+              <a:t>7/6/2025</a:t>
             </a:fld>
             <a:endParaRPr lang="en-US"/>
           </a:p>
@@ -2880,7 +3127,6 @@
               <a:rPr lang="en-US"/>
               <a:t>Click to edit Master title style</a:t>
             </a:r>
-            <a:endParaRPr lang="en-US" dirty="0"/>
           </a:p>
         </p:txBody>
       </p:sp>
@@ -2942,7 +3188,6 @@
               <a:rPr lang="en-US"/>
               <a:t>Fifth level</a:t>
             </a:r>
-            <a:endParaRPr lang="en-US" dirty="0"/>
           </a:p>
         </p:txBody>
       </p:sp>
@@ -2981,7 +3226,7 @@
           <a:p>
             <a:fld id="{846CE7D5-CF57-46EF-B807-FDD0502418D4}" type="datetimeFigureOut">
               <a:rPr lang="en-US" smtClean="0"/>
-              <a:t>7/2/2025</a:t>
+              <a:t>7/6/2025</a:t>
             </a:fld>
             <a:endParaRPr lang="en-US"/>
           </a:p>
@@ -3402,7 +3647,7 @@
           <a:lstStyle/>
           <a:p>
             <a:r>
-              <a:rPr lang="en-US" dirty="0" err="1"/>
+              <a:rPr lang="en-US" err="1"/>
               <a:t>DevSecOps</a:t>
             </a:r>
           </a:p>
@@ -3426,126 +3671,134 @@
           <a:lstStyle/>
           <a:p>
             <a:r>
-              <a:rPr lang="en-US" dirty="0"/>
-              <a:t>Esse material </a:t>
-            </a:r>
-            <a:r>
-              <a:rPr lang="en-US" dirty="0" err="1"/>
+              <a:rPr lang="en-US"/>
+              <a:t>Este material </a:t>
+            </a:r>
+            <a:r>
+              <a:rPr lang="en-US" err="1"/>
               <a:t>tem</a:t>
             </a:r>
             <a:r>
-              <a:rPr lang="en-US" dirty="0"/>
-              <a:t> </a:t>
-            </a:r>
-            <a:r>
-              <a:rPr lang="en-US" dirty="0" err="1"/>
+              <a:rPr lang="en-US"/>
+              <a:t> </a:t>
+            </a:r>
+            <a:r>
+              <a:rPr lang="en-US" err="1"/>
               <a:t>como</a:t>
             </a:r>
             <a:r>
-              <a:rPr lang="en-US" dirty="0"/>
-              <a:t> </a:t>
-            </a:r>
-            <a:r>
-              <a:rPr lang="en-US" dirty="0" err="1"/>
+              <a:rPr lang="en-US"/>
+              <a:t> </a:t>
+            </a:r>
+            <a:r>
+              <a:rPr lang="en-US" err="1"/>
               <a:t>objetivo</a:t>
             </a:r>
             <a:r>
-              <a:rPr lang="en-US" dirty="0"/>
+              <a:rPr lang="en-US"/>
               <a:t> ser um </a:t>
             </a:r>
             <a:r>
-              <a:rPr lang="en-US" dirty="0" err="1"/>
+              <a:rPr lang="en-US" err="1"/>
               <a:t>exemplo</a:t>
             </a:r>
             <a:r>
-              <a:rPr lang="en-US" dirty="0"/>
+              <a:rPr lang="en-US"/>
               <a:t> de </a:t>
             </a:r>
             <a:r>
-              <a:rPr lang="en-US" dirty="0" err="1"/>
+              <a:rPr lang="en-US" err="1"/>
               <a:t>documento</a:t>
             </a:r>
             <a:r>
-              <a:rPr lang="en-US" dirty="0"/>
+              <a:rPr lang="en-US"/>
               <a:t> a ser </a:t>
             </a:r>
             <a:r>
-              <a:rPr lang="en-US" dirty="0" err="1"/>
+              <a:rPr lang="en-US" err="1"/>
               <a:t>apresentado</a:t>
             </a:r>
             <a:r>
-              <a:rPr lang="en-US" dirty="0"/>
-              <a:t> as </a:t>
-            </a:r>
-            <a:r>
-              <a:rPr lang="en-US" dirty="0" err="1"/>
+              <a:rPr lang="en-US"/>
+              <a:t> </a:t>
+            </a:r>
+            <a:r>
+              <a:rPr lang="en-US" err="1"/>
+              <a:t>às</a:t>
+            </a:r>
+            <a:r>
+              <a:rPr lang="en-US"/>
+              <a:t> </a:t>
+            </a:r>
+            <a:r>
+              <a:rPr lang="en-US" err="1"/>
               <a:t>equipas</a:t>
             </a:r>
             <a:r>
-              <a:rPr lang="en-US" dirty="0"/>
+              <a:rPr lang="en-US"/>
               <a:t>, utilize e </a:t>
             </a:r>
             <a:r>
-              <a:rPr lang="en-US" dirty="0" err="1"/>
+              <a:rPr lang="en-US" err="1"/>
               <a:t>modifique</a:t>
             </a:r>
             <a:r>
-              <a:rPr lang="en-US" dirty="0"/>
+              <a:rPr lang="en-US"/>
               <a:t> do </a:t>
             </a:r>
             <a:r>
-              <a:rPr lang="en-US" dirty="0" err="1"/>
+              <a:rPr lang="en-US" err="1"/>
               <a:t>jeito</a:t>
             </a:r>
             <a:r>
-              <a:rPr lang="en-US" dirty="0"/>
+              <a:rPr lang="en-US"/>
               <a:t> que achar </a:t>
             </a:r>
             <a:r>
-              <a:rPr lang="en-US" dirty="0" err="1"/>
+              <a:rPr lang="en-US" err="1"/>
               <a:t>melhor</a:t>
             </a:r>
             <a:r>
-              <a:rPr lang="en-US" dirty="0"/>
+              <a:rPr lang="en-US"/>
               <a:t> e que se </a:t>
             </a:r>
             <a:r>
-              <a:rPr lang="en-US" dirty="0" err="1"/>
+              <a:rPr lang="en-US" err="1"/>
               <a:t>adeque</a:t>
             </a:r>
             <a:r>
-              <a:rPr lang="en-US" dirty="0"/>
-              <a:t> </a:t>
-            </a:r>
-            <a:r>
-              <a:rPr lang="en-US" dirty="0" err="1"/>
+              <a:rPr lang="en-US"/>
+              <a:t> </a:t>
+            </a:r>
+            <a:r>
+              <a:rPr lang="en-US" err="1"/>
               <a:t>mais</a:t>
             </a:r>
             <a:r>
-              <a:rPr lang="en-US" dirty="0"/>
-              <a:t> </a:t>
-            </a:r>
-            <a:r>
-              <a:rPr lang="en-US" dirty="0" err="1"/>
+              <a:rPr lang="en-US"/>
+              <a:t> </a:t>
+            </a:r>
+            <a:r>
+              <a:rPr lang="en-US" err="1"/>
               <a:t>ao</a:t>
             </a:r>
             <a:r>
-              <a:rPr lang="en-US" dirty="0"/>
-              <a:t> </a:t>
-            </a:r>
-            <a:r>
-              <a:rPr lang="en-US" dirty="0" err="1"/>
+              <a:rPr lang="en-US"/>
+              <a:t> </a:t>
+            </a:r>
+            <a:r>
+              <a:rPr lang="en-US" err="1"/>
               <a:t>seu</a:t>
             </a:r>
             <a:r>
-              <a:rPr lang="en-US" dirty="0"/>
-              <a:t> </a:t>
-            </a:r>
-            <a:r>
-              <a:rPr lang="en-US" dirty="0" err="1"/>
-              <a:t>negocio</a:t>
-            </a:r>
-            <a:endParaRPr lang="en-US" dirty="0"/>
+              <a:rPr lang="en-US"/>
+              <a:t> </a:t>
+            </a:r>
+            <a:r>
+              <a:rPr lang="en-US" err="1"/>
+              <a:t>negócio</a:t>
+            </a:r>
+            <a:endParaRPr lang="en-US"/>
           </a:p>
         </p:txBody>
       </p:sp>
@@ -3601,9 +3854,18 @@
           <a:lstStyle/>
           <a:p>
             <a:r>
-              <a:rPr lang="en-US"/>
-              <a:t>Comecando DevSecOps</a:t>
-            </a:r>
+              <a:rPr lang="en-US" err="1"/>
+              <a:t>Começando</a:t>
+            </a:r>
+            <a:r>
+              <a:rPr lang="en-US"/>
+              <a:t> </a:t>
+            </a:r>
+            <a:r>
+              <a:rPr lang="en-US" err="1"/>
+              <a:t>DevSecOps</a:t>
+            </a:r>
+            <a:endParaRPr lang="en-US"/>
           </a:p>
         </p:txBody>
       </p:sp>
@@ -3632,7 +3894,23 @@
           <a:p>
             <a:r>
               <a:rPr lang="en-US"/>
-              <a:t>3 – Promova a "Cultura de seguranca"</a:t>
+              <a:t>3 – </a:t>
+            </a:r>
+            <a:r>
+              <a:rPr lang="en-US" err="1"/>
+              <a:t>Promova</a:t>
+            </a:r>
+            <a:r>
+              <a:rPr lang="en-US"/>
+              <a:t> a "Cultura de </a:t>
+            </a:r>
+            <a:r>
+              <a:rPr lang="en-US" err="1"/>
+              <a:t>segurança</a:t>
+            </a:r>
+            <a:r>
+              <a:rPr lang="en-US"/>
+              <a:t>"</a:t>
             </a:r>
           </a:p>
           <a:p>
@@ -3641,9 +3919,42 @@
               <a:buChar char="o"/>
             </a:pPr>
             <a:r>
-              <a:rPr lang="en-US"/>
-              <a:t>Explique a equipa a motivacao de se ter DevSecOps</a:t>
-            </a:r>
+              <a:rPr lang="en-US" err="1"/>
+              <a:t>Explique</a:t>
+            </a:r>
+            <a:r>
+              <a:rPr lang="en-US"/>
+              <a:t> a </a:t>
+            </a:r>
+            <a:r>
+              <a:rPr lang="en-US" err="1"/>
+              <a:t>equipa</a:t>
+            </a:r>
+            <a:r>
+              <a:rPr lang="en-US"/>
+              <a:t> a </a:t>
+            </a:r>
+            <a:r>
+              <a:rPr lang="en-US" err="1"/>
+              <a:t>motivação</a:t>
+            </a:r>
+            <a:r>
+              <a:rPr lang="en-US"/>
+              <a:t> de se </a:t>
+            </a:r>
+            <a:r>
+              <a:rPr lang="en-US" err="1"/>
+              <a:t>ter</a:t>
+            </a:r>
+            <a:r>
+              <a:rPr lang="en-US"/>
+              <a:t> </a:t>
+            </a:r>
+            <a:r>
+              <a:rPr lang="en-US" err="1"/>
+              <a:t>DevSecOps</a:t>
+            </a:r>
+            <a:endParaRPr lang="en-US"/>
           </a:p>
           <a:p>
             <a:pPr lvl="1">
@@ -3651,9 +3962,42 @@
               <a:buChar char="o"/>
             </a:pPr>
             <a:r>
-              <a:rPr lang="en-US"/>
-              <a:t>Encoraje o compartilhamento de responsabilidade e seguranca proativa</a:t>
-            </a:r>
+              <a:rPr lang="en-US" err="1"/>
+              <a:t>Encoraje</a:t>
+            </a:r>
+            <a:r>
+              <a:rPr lang="en-US"/>
+              <a:t> o </a:t>
+            </a:r>
+            <a:r>
+              <a:rPr lang="en-US" err="1"/>
+              <a:t>compartilhamento</a:t>
+            </a:r>
+            <a:r>
+              <a:rPr lang="en-US"/>
+              <a:t> de </a:t>
+            </a:r>
+            <a:r>
+              <a:rPr lang="en-US" err="1"/>
+              <a:t>responsabilidade</a:t>
+            </a:r>
+            <a:r>
+              <a:rPr lang="en-US"/>
+              <a:t> e </a:t>
+            </a:r>
+            <a:r>
+              <a:rPr lang="en-US" err="1"/>
+              <a:t>segurança</a:t>
+            </a:r>
+            <a:r>
+              <a:rPr lang="en-US"/>
+              <a:t> </a:t>
+            </a:r>
+            <a:r>
+              <a:rPr lang="en-US" err="1"/>
+              <a:t>proativa</a:t>
+            </a:r>
+            <a:endParaRPr lang="en-US"/>
           </a:p>
           <a:p>
             <a:pPr lvl="1">
@@ -3661,8 +4005,52 @@
               <a:buChar char="o"/>
             </a:pPr>
             <a:r>
-              <a:rPr lang="en-US"/>
-              <a:t>Inclua seguranca nos objetivos das equipas e revisao de performance</a:t>
+              <a:rPr lang="en-US" err="1"/>
+              <a:t>Inclua</a:t>
+            </a:r>
+            <a:r>
+              <a:rPr lang="en-US"/>
+              <a:t> </a:t>
+            </a:r>
+            <a:r>
+              <a:rPr lang="en-US" err="1"/>
+              <a:t>segurança</a:t>
+            </a:r>
+            <a:r>
+              <a:rPr lang="en-US"/>
+              <a:t> </a:t>
+            </a:r>
+            <a:r>
+              <a:rPr lang="en-US" err="1"/>
+              <a:t>nos</a:t>
+            </a:r>
+            <a:r>
+              <a:rPr lang="en-US"/>
+              <a:t> </a:t>
+            </a:r>
+            <a:r>
+              <a:rPr lang="en-US" err="1"/>
+              <a:t>objetivos</a:t>
+            </a:r>
+            <a:r>
+              <a:rPr lang="en-US"/>
+              <a:t> das </a:t>
+            </a:r>
+            <a:r>
+              <a:rPr lang="en-US" err="1"/>
+              <a:t>equipas</a:t>
+            </a:r>
+            <a:r>
+              <a:rPr lang="en-US"/>
+              <a:t> e </a:t>
+            </a:r>
+            <a:r>
+              <a:rPr lang="en-US" err="1"/>
+              <a:t>revisão</a:t>
+            </a:r>
+            <a:r>
+              <a:rPr lang="en-US"/>
+              <a:t> de performance</a:t>
             </a:r>
           </a:p>
           <a:p>
@@ -3671,10 +4059,34 @@
               <a:buChar char="o"/>
             </a:pPr>
             <a:r>
-              <a:rPr lang="en-US"/>
-              <a:t>Inclua Key Performance Indicators (KPI's) nas metricas da equipa</a:t>
-            </a:r>
-            <a:endParaRPr lang="en-US" dirty="0"/>
+              <a:rPr lang="en-US" err="1"/>
+              <a:t>Inclua</a:t>
+            </a:r>
+            <a:r>
+              <a:rPr lang="en-US"/>
+              <a:t> Key Performance Indicators (KPI's) </a:t>
+            </a:r>
+            <a:r>
+              <a:rPr lang="en-US" err="1"/>
+              <a:t>nas</a:t>
+            </a:r>
+            <a:r>
+              <a:rPr lang="en-US"/>
+              <a:t> </a:t>
+            </a:r>
+            <a:r>
+              <a:rPr lang="en-US" err="1"/>
+              <a:t>métricas</a:t>
+            </a:r>
+            <a:r>
+              <a:rPr lang="en-US"/>
+              <a:t> da </a:t>
+            </a:r>
+            <a:r>
+              <a:rPr lang="en-US" err="1"/>
+              <a:t>equipa</a:t>
+            </a:r>
+            <a:endParaRPr lang="en-US"/>
           </a:p>
         </p:txBody>
       </p:sp>
@@ -3736,8 +4148,16 @@
           <a:lstStyle/>
           <a:p>
             <a:r>
-              <a:rPr lang="en-US"/>
-              <a:t>Comecando DevSecOps</a:t>
+              <a:rPr lang="en-US" err="1"/>
+              <a:t>Começando</a:t>
+            </a:r>
+            <a:r>
+              <a:rPr lang="en-US"/>
+              <a:t> </a:t>
+            </a:r>
+            <a:r>
+              <a:rPr lang="en-US" err="1"/>
+              <a:t>DevSecOps</a:t>
             </a:r>
           </a:p>
         </p:txBody>
@@ -3767,8 +4187,37 @@
           <a:p>
             <a:r>
               <a:rPr lang="en-US"/>
-              <a:t>4– Automacoes do principio ao fim</a:t>
-            </a:r>
+              <a:t>4– </a:t>
+            </a:r>
+            <a:r>
+              <a:rPr lang="en-US" err="1"/>
+              <a:t>Automações</a:t>
+            </a:r>
+            <a:r>
+              <a:rPr lang="en-US"/>
+              <a:t> do </a:t>
+            </a:r>
+            <a:r>
+              <a:rPr lang="en-US" err="1"/>
+              <a:t>princípio</a:t>
+            </a:r>
+            <a:r>
+              <a:rPr lang="en-US"/>
+              <a:t> </a:t>
+            </a:r>
+            <a:r>
+              <a:rPr lang="en-US" err="1"/>
+              <a:t>ao</a:t>
+            </a:r>
+            <a:r>
+              <a:rPr lang="en-US"/>
+              <a:t> </a:t>
+            </a:r>
+            <a:r>
+              <a:rPr lang="en-US" err="1"/>
+              <a:t>fim</a:t>
+            </a:r>
+            <a:endParaRPr lang="en-US"/>
           </a:p>
           <a:p>
             <a:pPr lvl="1">
@@ -3776,8 +4225,28 @@
               <a:buChar char="o"/>
             </a:pPr>
             <a:r>
-              <a:rPr lang="en-US"/>
-              <a:t>Integre ferramentas de seguranca aos pipelines de CI/CD</a:t>
+              <a:rPr lang="en-US" err="1"/>
+              <a:t>Integre</a:t>
+            </a:r>
+            <a:r>
+              <a:rPr lang="en-US"/>
+              <a:t> ferramentas de </a:t>
+            </a:r>
+            <a:r>
+              <a:rPr lang="en-US" err="1"/>
+              <a:t>segurança</a:t>
+            </a:r>
+            <a:r>
+              <a:rPr lang="en-US"/>
+              <a:t> </a:t>
+            </a:r>
+            <a:r>
+              <a:rPr lang="en-US" err="1"/>
+              <a:t>aos</a:t>
+            </a:r>
+            <a:r>
+              <a:rPr lang="en-US"/>
+              <a:t> pipelines de CI/CD</a:t>
             </a:r>
           </a:p>
           <a:p>
@@ -3787,7 +4256,39 @@
             </a:pPr>
             <a:r>
               <a:rPr lang="en-US"/>
-              <a:t>Automatize o scan de vulnerabilidades, checagem de dependencias e requisitos de compliance</a:t>
+              <a:t>Automatize o scan de </a:t>
+            </a:r>
+            <a:r>
+              <a:rPr lang="en-US" err="1"/>
+              <a:t>vulnerabilidades</a:t>
+            </a:r>
+            <a:r>
+              <a:rPr lang="en-US"/>
+              <a:t>, </a:t>
+            </a:r>
+            <a:r>
+              <a:rPr lang="en-US" err="1"/>
+              <a:t>checagem</a:t>
+            </a:r>
+            <a:r>
+              <a:rPr lang="en-US"/>
+              <a:t> de </a:t>
+            </a:r>
+            <a:r>
+              <a:rPr lang="en-US" err="1"/>
+              <a:t>dependências</a:t>
+            </a:r>
+            <a:r>
+              <a:rPr lang="en-US"/>
+              <a:t> e </a:t>
+            </a:r>
+            <a:r>
+              <a:rPr lang="en-US" err="1"/>
+              <a:t>requisitos</a:t>
+            </a:r>
+            <a:r>
+              <a:rPr lang="en-US"/>
+              <a:t> de compliance</a:t>
             </a:r>
           </a:p>
           <a:p>
@@ -3796,10 +4297,49 @@
               <a:buChar char="o"/>
             </a:pPr>
             <a:r>
-              <a:rPr lang="en-US"/>
-              <a:t>Tenha um processo que garanta a revisao periodica dessas automacoes</a:t>
-            </a:r>
-            <a:endParaRPr lang="en-US" dirty="0"/>
+              <a:rPr lang="en-US" err="1"/>
+              <a:t>Tenha</a:t>
+            </a:r>
+            <a:r>
+              <a:rPr lang="en-US"/>
+              <a:t> um </a:t>
+            </a:r>
+            <a:r>
+              <a:rPr lang="en-US" err="1"/>
+              <a:t>processo</a:t>
+            </a:r>
+            <a:r>
+              <a:rPr lang="en-US"/>
+              <a:t> que </a:t>
+            </a:r>
+            <a:r>
+              <a:rPr lang="en-US" err="1"/>
+              <a:t>garanta</a:t>
+            </a:r>
+            <a:r>
+              <a:rPr lang="en-US"/>
+              <a:t> a </a:t>
+            </a:r>
+            <a:r>
+              <a:rPr lang="en-US" err="1"/>
+              <a:t>revisão</a:t>
+            </a:r>
+            <a:r>
+              <a:rPr lang="en-US"/>
+              <a:t> </a:t>
+            </a:r>
+            <a:r>
+              <a:rPr lang="en-US" err="1"/>
+              <a:t>periódica</a:t>
+            </a:r>
+            <a:r>
+              <a:rPr lang="en-US"/>
+              <a:t> dessas </a:t>
+            </a:r>
+            <a:r>
+              <a:rPr lang="en-US" err="1"/>
+              <a:t>automações</a:t>
+            </a:r>
           </a:p>
         </p:txBody>
       </p:sp>
@@ -4003,7 +4543,7 @@
             <a:endParaRPr lang="en-US"/>
           </a:p>
           <a:p>
-            <a:endParaRPr lang="en-US" dirty="0"/>
+            <a:endParaRPr lang="en-US"/>
           </a:p>
         </p:txBody>
       </p:sp>
@@ -4089,21 +4629,161 @@
           <a:lstStyle/>
           <a:p>
             <a:r>
-              <a:rPr lang="en-US"/>
-              <a:t>Resistencia cultural: Superar a ideia de que seguranca e responsabilidade de uma equipa</a:t>
-            </a:r>
-          </a:p>
-          <a:p>
-            <a:r>
-              <a:rPr lang="en-US"/>
-              <a:t>Ferramentas e integracoes: Definir quais ferramentas fazem sentido na sua empresa e intrega-las</a:t>
-            </a:r>
-            <a:endParaRPr lang="en-US" dirty="0"/>
-          </a:p>
-          <a:p>
-            <a:r>
-              <a:rPr lang="en-US"/>
-              <a:t>Falsos-positivos: Ferramentas muitas vezes precisam de </a:t>
+              <a:rPr lang="en-US" err="1"/>
+              <a:t>Resistência</a:t>
+            </a:r>
+            <a:r>
+              <a:rPr lang="en-US"/>
+              <a:t> cultural: </a:t>
+            </a:r>
+            <a:r>
+              <a:rPr lang="en-US" err="1"/>
+              <a:t>Superar</a:t>
+            </a:r>
+            <a:r>
+              <a:rPr lang="en-US"/>
+              <a:t> a </a:t>
+            </a:r>
+            <a:r>
+              <a:rPr lang="en-US" err="1"/>
+              <a:t>ideia</a:t>
+            </a:r>
+            <a:r>
+              <a:rPr lang="en-US"/>
+              <a:t> de que </a:t>
+            </a:r>
+            <a:r>
+              <a:rPr lang="en-US" err="1"/>
+              <a:t>segurança</a:t>
+            </a:r>
+            <a:r>
+              <a:rPr lang="en-US"/>
+              <a:t> e </a:t>
+            </a:r>
+            <a:r>
+              <a:rPr lang="en-US" err="1"/>
+              <a:t>responsabilidade</a:t>
+            </a:r>
+            <a:r>
+              <a:rPr lang="en-US"/>
+              <a:t> de </a:t>
+            </a:r>
+            <a:r>
+              <a:rPr lang="en-US" err="1"/>
+              <a:t>uma</a:t>
+            </a:r>
+            <a:r>
+              <a:rPr lang="en-US"/>
+              <a:t> </a:t>
+            </a:r>
+            <a:r>
+              <a:rPr lang="en-US" err="1"/>
+              <a:t>equipa</a:t>
+            </a:r>
+            <a:endParaRPr lang="en-US"/>
+          </a:p>
+          <a:p>
+            <a:r>
+              <a:rPr lang="en-US"/>
+              <a:t>Ferramentas e </a:t>
+            </a:r>
+            <a:r>
+              <a:rPr lang="en-US" err="1"/>
+              <a:t>integrações</a:t>
+            </a:r>
+            <a:r>
+              <a:rPr lang="en-US"/>
+              <a:t>: </a:t>
+            </a:r>
+            <a:r>
+              <a:rPr lang="en-US" err="1"/>
+              <a:t>Definir</a:t>
+            </a:r>
+            <a:r>
+              <a:rPr lang="en-US"/>
+              <a:t> quais ferramentas </a:t>
+            </a:r>
+            <a:r>
+              <a:rPr lang="en-US" err="1"/>
+              <a:t>fazem</a:t>
+            </a:r>
+            <a:r>
+              <a:rPr lang="en-US"/>
+              <a:t> </a:t>
+            </a:r>
+            <a:r>
+              <a:rPr lang="en-US" err="1"/>
+              <a:t>sentido</a:t>
+            </a:r>
+            <a:r>
+              <a:rPr lang="en-US"/>
+              <a:t> </a:t>
+            </a:r>
+            <a:r>
+              <a:rPr lang="en-US" err="1"/>
+              <a:t>na</a:t>
+            </a:r>
+            <a:r>
+              <a:rPr lang="en-US"/>
+              <a:t> </a:t>
+            </a:r>
+            <a:r>
+              <a:rPr lang="en-US" err="1"/>
+              <a:t>sua</a:t>
+            </a:r>
+            <a:r>
+              <a:rPr lang="en-US"/>
+              <a:t> </a:t>
+            </a:r>
+            <a:r>
+              <a:rPr lang="en-US" err="1"/>
+              <a:t>empresa</a:t>
+            </a:r>
+            <a:r>
+              <a:rPr lang="en-US"/>
+              <a:t> e </a:t>
+            </a:r>
+            <a:r>
+              <a:rPr lang="en-US" err="1"/>
+              <a:t>intregá</a:t>
+            </a:r>
+            <a:r>
+              <a:rPr lang="en-US"/>
+              <a:t>-las</a:t>
+            </a:r>
+          </a:p>
+          <a:p>
+            <a:r>
+              <a:rPr lang="en-US" err="1"/>
+              <a:t>Falsos-positivos</a:t>
+            </a:r>
+            <a:r>
+              <a:rPr lang="en-US"/>
+              <a:t>: Ferramentas </a:t>
+            </a:r>
+            <a:r>
+              <a:rPr lang="en-US" err="1"/>
+              <a:t>muitas</a:t>
+            </a:r>
+            <a:r>
+              <a:rPr lang="en-US"/>
+              <a:t> </a:t>
+            </a:r>
+            <a:r>
+              <a:rPr lang="en-US" err="1"/>
+              <a:t>vezes</a:t>
+            </a:r>
+            <a:r>
+              <a:rPr lang="en-US"/>
+              <a:t> </a:t>
+            </a:r>
+            <a:r>
+              <a:rPr lang="en-US" err="1"/>
+              <a:t>precisam</a:t>
+            </a:r>
+            <a:r>
+              <a:rPr lang="en-US"/>
+              <a:t> de </a:t>
             </a:r>
             <a:r>
               <a:rPr lang="en-US" i="1"/>
@@ -4111,21 +4791,191 @@
             </a:r>
             <a:r>
               <a:rPr lang="en-US"/>
-              <a:t>para nao identificarem muitos falsos positivos</a:t>
-            </a:r>
-          </a:p>
-          <a:p>
-            <a:r>
-              <a:rPr lang="en-US"/>
-              <a:t>Falta de skill: E necessario treinar os desenvolvedores e time de operacoes em conceitos de seguranca e DevSecOps</a:t>
-            </a:r>
-          </a:p>
-          <a:p>
-            <a:r>
-              <a:rPr lang="en-US"/>
-              <a:t>Medir a maturidade: E necessario criar metricas para acompanhar a evolucao do processo</a:t>
-            </a:r>
-            <a:endParaRPr lang="en-US" dirty="0"/>
+              <a:t>para </a:t>
+            </a:r>
+            <a:r>
+              <a:rPr lang="en-US" err="1"/>
+              <a:t>não</a:t>
+            </a:r>
+            <a:r>
+              <a:rPr lang="en-US"/>
+              <a:t> </a:t>
+            </a:r>
+            <a:r>
+              <a:rPr lang="en-US" err="1"/>
+              <a:t>identificarem</a:t>
+            </a:r>
+            <a:r>
+              <a:rPr lang="en-US"/>
+              <a:t> </a:t>
+            </a:r>
+            <a:r>
+              <a:rPr lang="en-US" err="1"/>
+              <a:t>muitos</a:t>
+            </a:r>
+            <a:r>
+              <a:rPr lang="en-US"/>
+              <a:t> </a:t>
+            </a:r>
+            <a:r>
+              <a:rPr lang="en-US" err="1"/>
+              <a:t>falsos</a:t>
+            </a:r>
+            <a:r>
+              <a:rPr lang="en-US"/>
+              <a:t> </a:t>
+            </a:r>
+            <a:r>
+              <a:rPr lang="en-US" err="1"/>
+              <a:t>positivos</a:t>
+            </a:r>
+            <a:endParaRPr lang="en-US"/>
+          </a:p>
+          <a:p>
+            <a:r>
+              <a:rPr lang="en-US"/>
+              <a:t>Falta de skill: É </a:t>
+            </a:r>
+            <a:r>
+              <a:rPr lang="en-US" err="1"/>
+              <a:t>necessario</a:t>
+            </a:r>
+            <a:r>
+              <a:rPr lang="en-US"/>
+              <a:t> </a:t>
+            </a:r>
+            <a:r>
+              <a:rPr lang="en-US" err="1"/>
+              <a:t>treinar</a:t>
+            </a:r>
+            <a:r>
+              <a:rPr lang="en-US"/>
+              <a:t> </a:t>
+            </a:r>
+            <a:r>
+              <a:rPr lang="en-US" err="1"/>
+              <a:t>os</a:t>
+            </a:r>
+            <a:r>
+              <a:rPr lang="en-US"/>
+              <a:t> </a:t>
+            </a:r>
+            <a:r>
+              <a:rPr lang="en-US" err="1"/>
+              <a:t>desenvolvedores</a:t>
+            </a:r>
+            <a:r>
+              <a:rPr lang="en-US"/>
+              <a:t> e a </a:t>
+            </a:r>
+            <a:r>
+              <a:rPr lang="en-US" err="1"/>
+              <a:t>equipa</a:t>
+            </a:r>
+            <a:r>
+              <a:rPr lang="en-US"/>
+              <a:t> de </a:t>
+            </a:r>
+            <a:r>
+              <a:rPr lang="en-US" err="1"/>
+              <a:t>operações</a:t>
+            </a:r>
+            <a:r>
+              <a:rPr lang="en-US"/>
+              <a:t> </a:t>
+            </a:r>
+            <a:r>
+              <a:rPr lang="en-US" err="1"/>
+              <a:t>em</a:t>
+            </a:r>
+            <a:r>
+              <a:rPr lang="en-US"/>
+              <a:t> </a:t>
+            </a:r>
+            <a:r>
+              <a:rPr lang="en-US" err="1"/>
+              <a:t>conceitos</a:t>
+            </a:r>
+            <a:r>
+              <a:rPr lang="en-US"/>
+              <a:t> de </a:t>
+            </a:r>
+            <a:r>
+              <a:rPr lang="en-US" err="1"/>
+              <a:t>segurança</a:t>
+            </a:r>
+            <a:r>
+              <a:rPr lang="en-US"/>
+              <a:t> e </a:t>
+            </a:r>
+            <a:r>
+              <a:rPr lang="en-US" err="1"/>
+              <a:t>DevSecOps</a:t>
+            </a:r>
+            <a:endParaRPr lang="en-US"/>
+          </a:p>
+          <a:p>
+            <a:r>
+              <a:rPr lang="en-US" err="1"/>
+              <a:t>Medir</a:t>
+            </a:r>
+            <a:r>
+              <a:rPr lang="en-US"/>
+              <a:t> a </a:t>
+            </a:r>
+            <a:r>
+              <a:rPr lang="en-US" err="1"/>
+              <a:t>maturidade</a:t>
+            </a:r>
+            <a:r>
+              <a:rPr lang="en-US"/>
+              <a:t>: É </a:t>
+            </a:r>
+            <a:r>
+              <a:rPr lang="en-US" err="1"/>
+              <a:t>necessário</a:t>
+            </a:r>
+            <a:r>
+              <a:rPr lang="en-US"/>
+              <a:t> </a:t>
+            </a:r>
+            <a:r>
+              <a:rPr lang="en-US" err="1"/>
+              <a:t>criar</a:t>
+            </a:r>
+            <a:r>
+              <a:rPr lang="en-US"/>
+              <a:t> </a:t>
+            </a:r>
+            <a:r>
+              <a:rPr lang="en-US" err="1"/>
+              <a:t>métricas</a:t>
+            </a:r>
+            <a:r>
+              <a:rPr lang="en-US"/>
+              <a:t> para </a:t>
+            </a:r>
+            <a:r>
+              <a:rPr lang="en-US" err="1"/>
+              <a:t>acompanhar</a:t>
+            </a:r>
+            <a:r>
+              <a:rPr lang="en-US"/>
+              <a:t> a </a:t>
+            </a:r>
+            <a:r>
+              <a:rPr lang="en-US" err="1"/>
+              <a:t>evolução</a:t>
+            </a:r>
+            <a:r>
+              <a:rPr lang="en-US"/>
+              <a:t> do </a:t>
+            </a:r>
+            <a:r>
+              <a:rPr lang="en-US" err="1"/>
+              <a:t>processo</a:t>
+            </a:r>
+            <a:endParaRPr lang="en-US"/>
           </a:p>
         </p:txBody>
       </p:sp>
@@ -4181,8 +5031,8 @@
           <a:lstStyle/>
           <a:p>
             <a:r>
-              <a:rPr lang="en-US"/>
-              <a:t>Conclusoes</a:t>
+              <a:rPr lang="en-US" err="1"/>
+              <a:t>Conclusões</a:t>
             </a:r>
           </a:p>
         </p:txBody>
@@ -4211,30 +5061,116 @@
           <a:lstStyle/>
           <a:p>
             <a:r>
-              <a:rPr lang="en-US"/>
-              <a:t>DevSecOps e um processo continuo</a:t>
-            </a:r>
-          </a:p>
-          <a:p>
-            <a:r>
-              <a:rPr lang="en-US"/>
-              <a:t>Seguranca e uma responsabilidade de todos</a:t>
-            </a:r>
-          </a:p>
-          <a:p>
-            <a:r>
-              <a:rPr lang="en-US"/>
-              <a:t>Promova a cultura de automacao e colaboracao</a:t>
-            </a:r>
-          </a:p>
-          <a:p>
-            <a:r>
-              <a:rPr lang="en-US"/>
-              <a:t>Comece devagar, analise e expanda</a:t>
-            </a:r>
-          </a:p>
-          <a:p>
-            <a:endParaRPr lang="en-US" dirty="0"/>
+              <a:rPr lang="en-US" err="1"/>
+              <a:t>DevSecOps</a:t>
+            </a:r>
+            <a:r>
+              <a:rPr lang="en-US"/>
+              <a:t> e um </a:t>
+            </a:r>
+            <a:r>
+              <a:rPr lang="en-US" err="1"/>
+              <a:t>processo</a:t>
+            </a:r>
+            <a:r>
+              <a:rPr lang="en-US"/>
+              <a:t> </a:t>
+            </a:r>
+            <a:r>
+              <a:rPr lang="en-US" err="1"/>
+              <a:t>contínuo</a:t>
+            </a:r>
+          </a:p>
+          <a:p>
+            <a:r>
+              <a:rPr lang="en-US"/>
+              <a:t>Segurança e </a:t>
+            </a:r>
+            <a:r>
+              <a:rPr lang="en-US" err="1"/>
+              <a:t>uma</a:t>
+            </a:r>
+            <a:r>
+              <a:rPr lang="en-US"/>
+              <a:t> </a:t>
+            </a:r>
+            <a:r>
+              <a:rPr lang="en-US" err="1"/>
+              <a:t>responsabilidade</a:t>
+            </a:r>
+            <a:r>
+              <a:rPr lang="en-US"/>
+              <a:t> de </a:t>
+            </a:r>
+            <a:r>
+              <a:rPr lang="en-US" err="1"/>
+              <a:t>todos</a:t>
+            </a:r>
+            <a:endParaRPr lang="en-US"/>
+          </a:p>
+          <a:p>
+            <a:r>
+              <a:rPr lang="en-US" err="1"/>
+              <a:t>Promova</a:t>
+            </a:r>
+            <a:r>
+              <a:rPr lang="en-US"/>
+              <a:t> a </a:t>
+            </a:r>
+            <a:r>
+              <a:rPr lang="en-US" err="1"/>
+              <a:t>cultura</a:t>
+            </a:r>
+            <a:r>
+              <a:rPr lang="en-US"/>
+              <a:t> de </a:t>
+            </a:r>
+            <a:r>
+              <a:rPr lang="en-US" err="1"/>
+              <a:t>automação</a:t>
+            </a:r>
+            <a:r>
+              <a:rPr lang="en-US"/>
+              <a:t> e </a:t>
+            </a:r>
+            <a:r>
+              <a:rPr lang="en-US" err="1"/>
+              <a:t>colaboração</a:t>
+            </a:r>
+          </a:p>
+          <a:p>
+            <a:r>
+              <a:rPr lang="en-US" err="1"/>
+              <a:t>Comece</a:t>
+            </a:r>
+            <a:r>
+              <a:rPr lang="en-US"/>
+              <a:t> </a:t>
+            </a:r>
+            <a:r>
+              <a:rPr lang="en-US" err="1"/>
+              <a:t>devagar</a:t>
+            </a:r>
+            <a:r>
+              <a:rPr lang="en-US"/>
+              <a:t>, </a:t>
+            </a:r>
+            <a:r>
+              <a:rPr lang="en-US" err="1"/>
+              <a:t>analise</a:t>
+            </a:r>
+            <a:r>
+              <a:rPr lang="en-US"/>
+              <a:t> e </a:t>
+            </a:r>
+            <a:r>
+              <a:rPr lang="en-US" err="1"/>
+              <a:t>expanda</a:t>
+            </a:r>
+            <a:endParaRPr lang="en-US"/>
+          </a:p>
+          <a:p>
+            <a:endParaRPr lang="en-US"/>
           </a:p>
         </p:txBody>
       </p:sp>
@@ -4328,7 +5264,7 @@
             </a:r>
           </a:p>
           <a:p>
-            <a:endParaRPr lang="en-US" dirty="0"/>
+            <a:endParaRPr lang="en-US"/>
           </a:p>
         </p:txBody>
       </p:sp>
@@ -4384,8 +5320,8 @@
           <a:lstStyle/>
           <a:p>
             <a:r>
-              <a:rPr lang="en-US"/>
-              <a:t>Referencias</a:t>
+              <a:rPr lang="en-US" err="1"/>
+              <a:t>Referências</a:t>
             </a:r>
           </a:p>
         </p:txBody>
@@ -4414,21 +5350,21 @@
           <a:lstStyle/>
           <a:p>
             <a:r>
-              <a:rPr lang="en-US" dirty="0">
+              <a:rPr lang="en-US">
                 <a:ea typeface="+mn-lt"/>
                 <a:cs typeface="+mn-lt"/>
                 <a:hlinkClick r:id="rId2"/>
               </a:rPr>
               <a:t>https://owasp.org/</a:t>
             </a:r>
-            <a:endParaRPr lang="en-US" dirty="0">
+            <a:endParaRPr lang="en-US">
               <a:ea typeface="+mn-lt"/>
               <a:cs typeface="+mn-lt"/>
             </a:endParaRPr>
           </a:p>
           <a:p>
             <a:r>
-              <a:rPr lang="en-US" dirty="0">
+              <a:rPr lang="en-US">
                 <a:ea typeface="+mn-lt"/>
                 <a:cs typeface="+mn-lt"/>
                 <a:hlinkClick r:id="rId3"/>
@@ -4438,7 +5374,7 @@
           </a:p>
           <a:p>
             <a:r>
-              <a:rPr lang="en-US" dirty="0">
+              <a:rPr lang="en-US">
                 <a:ea typeface="+mn-lt"/>
                 <a:cs typeface="+mn-lt"/>
                 <a:hlinkClick r:id="rId4"/>
@@ -4448,7 +5384,7 @@
           </a:p>
           <a:p>
             <a:r>
-              <a:rPr lang="en-US" dirty="0">
+              <a:rPr lang="en-US">
                 <a:ea typeface="+mn-lt"/>
                 <a:cs typeface="+mn-lt"/>
                 <a:hlinkClick r:id="rId5"/>
@@ -4458,7 +5394,7 @@
           </a:p>
           <a:p>
             <a:r>
-              <a:rPr lang="en-US" dirty="0">
+              <a:rPr lang="en-US">
                 <a:ea typeface="+mn-lt"/>
                 <a:cs typeface="+mn-lt"/>
               </a:rPr>
@@ -4519,7 +5455,7 @@
           <a:lstStyle/>
           <a:p>
             <a:r>
-              <a:rPr lang="en-US" dirty="0"/>
+              <a:rPr lang="en-US"/>
               <a:t>Agenda</a:t>
             </a:r>
           </a:p>
@@ -4549,97 +5485,107 @@
           <a:lstStyle/>
           <a:p>
             <a:r>
-              <a:rPr lang="en-US" dirty="0"/>
-              <a:t>O que e </a:t>
+              <a:rPr lang="en-US"/>
+              <a:t>O que é </a:t>
             </a:r>
             <a:r>
               <a:rPr lang="en-US" err="1"/>
               <a:t>DevSecOps</a:t>
             </a:r>
             <a:r>
-              <a:rPr lang="en-US" dirty="0"/>
+              <a:rPr lang="en-US"/>
               <a:t> ?</a:t>
             </a:r>
           </a:p>
           <a:p>
             <a:r>
-              <a:rPr lang="en-US" dirty="0" err="1"/>
-              <a:t>Porque</a:t>
-            </a:r>
-            <a:r>
-              <a:rPr lang="en-US" dirty="0"/>
-              <a:t> </a:t>
-            </a:r>
-            <a:r>
-              <a:rPr lang="en-US" dirty="0" err="1"/>
+              <a:rPr lang="en-US" err="1"/>
+              <a:t>Porquê</a:t>
+            </a:r>
+            <a:r>
+              <a:rPr lang="en-US"/>
+              <a:t> </a:t>
+            </a:r>
+            <a:r>
+              <a:rPr lang="en-US" err="1"/>
               <a:t>DevSecOps</a:t>
             </a:r>
             <a:r>
-              <a:rPr lang="en-US" dirty="0"/>
-              <a:t> e </a:t>
-            </a:r>
-            <a:r>
-              <a:rPr lang="en-US" dirty="0" err="1"/>
+              <a:rPr lang="en-US"/>
+              <a:t> é </a:t>
+            </a:r>
+            <a:r>
+              <a:rPr lang="en-US" err="1"/>
               <a:t>importante</a:t>
             </a:r>
             <a:r>
-              <a:rPr lang="en-US" dirty="0"/>
+              <a:rPr lang="en-US"/>
               <a:t> ?</a:t>
             </a:r>
           </a:p>
           <a:p>
             <a:r>
-              <a:rPr lang="en-US"/>
-              <a:t>Principios de </a:t>
+              <a:rPr lang="en-US" err="1"/>
+              <a:t>Princípios</a:t>
+            </a:r>
+            <a:r>
+              <a:rPr lang="en-US"/>
+              <a:t> de </a:t>
             </a:r>
             <a:r>
               <a:rPr lang="en-US" err="1"/>
               <a:t>DevSecOps</a:t>
             </a:r>
-            <a:endParaRPr lang="en-US" dirty="0" err="1"/>
-          </a:p>
-          <a:p>
-            <a:r>
-              <a:rPr lang="en-US" err="1"/>
-              <a:t>Comecando</a:t>
-            </a:r>
-            <a:r>
-              <a:rPr lang="en-US" dirty="0"/>
+            <a:endParaRPr lang="en-US"/>
+          </a:p>
+          <a:p>
+            <a:r>
+              <a:rPr lang="en-US" err="1"/>
+              <a:t>Começando</a:t>
+            </a:r>
+            <a:r>
+              <a:rPr lang="en-US"/>
               <a:t> com </a:t>
             </a:r>
             <a:r>
               <a:rPr lang="en-US" err="1"/>
               <a:t>DevSecOps</a:t>
             </a:r>
-            <a:endParaRPr lang="en-US" dirty="0"/>
-          </a:p>
-          <a:p>
+            <a:endParaRPr lang="en-US"/>
+          </a:p>
+          <a:p>
+            <a:r>
+              <a:rPr lang="en-US" err="1">
+                <a:ea typeface="+mn-lt"/>
+                <a:cs typeface="+mn-lt"/>
+              </a:rPr>
+              <a:t>Exemplos</a:t>
+            </a:r>
             <a:r>
               <a:rPr lang="en-US">
                 <a:ea typeface="+mn-lt"/>
                 <a:cs typeface="+mn-lt"/>
               </a:rPr>
-              <a:t>Exemplos de ferramentas para CI/CD </a:t>
-            </a:r>
-            <a:endParaRPr lang="en-US" dirty="0"/>
-          </a:p>
-          <a:p>
-            <a:r>
-              <a:rPr lang="en-US"/>
+              <a:t> de ferramentas para CI/CD </a:t>
+            </a:r>
+            <a:endParaRPr lang="en-US"/>
+          </a:p>
+          <a:p>
+            <a:r>
+              <a:rPr lang="en-US" err="1"/>
               <a:t>Desafios</a:t>
             </a:r>
-            <a:endParaRPr lang="en-US" dirty="0"/>
-          </a:p>
-          <a:p>
-            <a:r>
-              <a:rPr lang="en-US"/>
-              <a:t>Conclusoes</a:t>
-            </a:r>
-            <a:endParaRPr lang="en-US" dirty="0"/>
-          </a:p>
-          <a:p>
-            <a:r>
-              <a:rPr lang="en-US" dirty="0"/>
+            <a:endParaRPr lang="en-US"/>
+          </a:p>
+          <a:p>
+            <a:r>
+              <a:rPr lang="en-US" err="1"/>
+              <a:t>Conclusōes</a:t>
+            </a:r>
+          </a:p>
+          <a:p>
+            <a:r>
+              <a:rPr lang="en-US"/>
               <a:t>Q&amp;A</a:t>
             </a:r>
           </a:p>
@@ -4697,15 +5643,15 @@
           <a:lstStyle/>
           <a:p>
             <a:r>
-              <a:rPr lang="en-US" dirty="0"/>
-              <a:t>O que e </a:t>
-            </a:r>
-            <a:r>
-              <a:rPr lang="en-US" dirty="0" err="1"/>
+              <a:rPr lang="en-US"/>
+              <a:t>O que é </a:t>
+            </a:r>
+            <a:r>
+              <a:rPr lang="en-US" err="1"/>
               <a:t>DevSecOps</a:t>
             </a:r>
             <a:r>
-              <a:rPr lang="en-US" dirty="0"/>
+              <a:rPr lang="en-US"/>
               <a:t> ?</a:t>
             </a:r>
           </a:p>
@@ -4741,47 +5687,47 @@
           </a:p>
           <a:p>
             <a:r>
-              <a:rPr lang="en-US" dirty="0" err="1"/>
+              <a:rPr lang="en-US" err="1"/>
               <a:t>Implementar</a:t>
             </a:r>
             <a:r>
-              <a:rPr lang="en-US" dirty="0"/>
-              <a:t> </a:t>
-            </a:r>
-            <a:r>
-              <a:rPr lang="en-US" dirty="0" err="1"/>
-              <a:t>seguranca</a:t>
-            </a:r>
-            <a:r>
-              <a:rPr lang="en-US" dirty="0"/>
+              <a:rPr lang="en-US"/>
+              <a:t> </a:t>
+            </a:r>
+            <a:r>
+              <a:rPr lang="en-US" err="1"/>
+              <a:t>segurança</a:t>
+            </a:r>
+            <a:r>
+              <a:rPr lang="en-US"/>
               <a:t> do </a:t>
             </a:r>
             <a:r>
-              <a:rPr lang="en-US" dirty="0" err="1"/>
-              <a:t>inicio</a:t>
-            </a:r>
-            <a:r>
-              <a:rPr lang="en-US" dirty="0"/>
-              <a:t> </a:t>
-            </a:r>
-            <a:r>
-              <a:rPr lang="en-US" dirty="0" err="1"/>
+              <a:rPr lang="en-US" err="1"/>
+              <a:t>início</a:t>
+            </a:r>
+            <a:r>
+              <a:rPr lang="en-US"/>
+              <a:t> </a:t>
+            </a:r>
+            <a:r>
+              <a:rPr lang="en-US" err="1"/>
               <a:t>ao</a:t>
             </a:r>
             <a:r>
-              <a:rPr lang="en-US" dirty="0"/>
-              <a:t> </a:t>
-            </a:r>
-            <a:r>
-              <a:rPr lang="en-US" dirty="0" err="1"/>
+              <a:rPr lang="en-US"/>
+              <a:t> </a:t>
+            </a:r>
+            <a:r>
+              <a:rPr lang="en-US" err="1"/>
               <a:t>fim</a:t>
             </a:r>
             <a:r>
-              <a:rPr lang="en-US" dirty="0"/>
+              <a:rPr lang="en-US"/>
               <a:t> do Software Development Life cycle (SDLC) - "</a:t>
             </a:r>
             <a:r>
-              <a:rPr lang="en-US" i="1" dirty="0"/>
+              <a:rPr lang="en-US" i="1"/>
               <a:t>Shift Left security"</a:t>
             </a:r>
           </a:p>
@@ -4875,15 +5821,15 @@
           <a:lstStyle/>
           <a:p>
             <a:r>
-              <a:rPr lang="en-US" dirty="0"/>
-              <a:t>O que e </a:t>
-            </a:r>
-            <a:r>
-              <a:rPr lang="en-US" dirty="0" err="1"/>
+              <a:rPr lang="en-US"/>
+              <a:t>O que é </a:t>
+            </a:r>
+            <a:r>
+              <a:rPr lang="en-US" err="1"/>
               <a:t>DevSecOps</a:t>
             </a:r>
             <a:r>
-              <a:rPr lang="en-US" dirty="0"/>
+              <a:rPr lang="en-US"/>
               <a:t> ?</a:t>
             </a:r>
           </a:p>
@@ -4979,15 +5925,15 @@
           <a:lstStyle/>
           <a:p>
             <a:r>
-              <a:rPr lang="en-US" dirty="0"/>
-              <a:t>O que e </a:t>
-            </a:r>
-            <a:r>
-              <a:rPr lang="en-US" dirty="0" err="1"/>
+              <a:rPr lang="en-US"/>
+              <a:t>O que é </a:t>
+            </a:r>
+            <a:r>
+              <a:rPr lang="en-US" err="1"/>
               <a:t>DevSecOps</a:t>
             </a:r>
             <a:r>
-              <a:rPr lang="en-US" dirty="0"/>
+              <a:rPr lang="en-US"/>
               <a:t> ?</a:t>
             </a:r>
           </a:p>
@@ -5017,13 +5963,13 @@
           <a:lstStyle/>
           <a:p>
             <a:r>
-              <a:rPr lang="en-US" b="1" dirty="0">
+              <a:rPr lang="en-US" b="1">
                 <a:ea typeface="+mn-lt"/>
                 <a:cs typeface="+mn-lt"/>
               </a:rPr>
               <a:t>Culture, Automation, Lean, Measurement, Sharing (CALMS) + Security</a:t>
             </a:r>
-            <a:endParaRPr lang="en-US" dirty="0"/>
+            <a:endParaRPr lang="en-US"/>
           </a:p>
           <a:p>
             <a:pPr lvl="1">
@@ -5031,14 +5977,14 @@
               <a:buChar char="o"/>
             </a:pPr>
             <a:r>
-              <a:rPr lang="en-US" b="1" dirty="0">
+              <a:rPr lang="en-US" b="1">
                 <a:ea typeface="+mn-lt"/>
                 <a:cs typeface="+mn-lt"/>
               </a:rPr>
               <a:t>Culture:</a:t>
             </a:r>
             <a:r>
-              <a:rPr lang="en-US" dirty="0">
+              <a:rPr lang="en-US">
                 <a:ea typeface="+mn-lt"/>
                 <a:cs typeface="+mn-lt"/>
               </a:rPr>
@@ -5052,7 +5998,7 @@
               <a:t>uma</a:t>
             </a:r>
             <a:r>
-              <a:rPr lang="en-US" dirty="0">
+              <a:rPr lang="en-US">
                 <a:ea typeface="+mn-lt"/>
                 <a:cs typeface="+mn-lt"/>
               </a:rPr>
@@ -5066,7 +6012,7 @@
               <a:t>responsabilidade</a:t>
             </a:r>
             <a:r>
-              <a:rPr lang="en-US" dirty="0">
+              <a:rPr lang="en-US">
                 <a:ea typeface="+mn-lt"/>
                 <a:cs typeface="+mn-lt"/>
               </a:rPr>
@@ -5087,14 +6033,14 @@
               <a:buChar char="o"/>
             </a:pPr>
             <a:r>
-              <a:rPr lang="en-US" b="1" dirty="0">
+              <a:rPr lang="en-US" b="1">
                 <a:ea typeface="+mn-lt"/>
                 <a:cs typeface="+mn-lt"/>
               </a:rPr>
               <a:t>Automation:</a:t>
             </a:r>
             <a:r>
-              <a:rPr lang="en-US" dirty="0">
+              <a:rPr lang="en-US">
                 <a:ea typeface="+mn-lt"/>
                 <a:cs typeface="+mn-lt"/>
               </a:rPr>
@@ -5108,7 +6054,7 @@
               <a:t>Automatizar</a:t>
             </a:r>
             <a:r>
-              <a:rPr lang="en-US" dirty="0">
+              <a:rPr lang="en-US">
                 <a:ea typeface="+mn-lt"/>
                 <a:cs typeface="+mn-lt"/>
               </a:rPr>
@@ -5119,9 +6065,9 @@
                 <a:ea typeface="+mn-lt"/>
                 <a:cs typeface="+mn-lt"/>
               </a:rPr>
-              <a:t>seguranca</a:t>
-            </a:r>
-            <a:endParaRPr lang="en-US"/>
+              <a:t>segurança</a:t>
+            </a:r>
+            <a:endParaRPr lang="en-US" err="1"/>
           </a:p>
           <a:p>
             <a:pPr lvl="1">
@@ -5129,14 +6075,14 @@
               <a:buChar char="o"/>
             </a:pPr>
             <a:r>
-              <a:rPr lang="en-US" b="1" dirty="0">
+              <a:rPr lang="en-US" b="1">
                 <a:ea typeface="+mn-lt"/>
                 <a:cs typeface="+mn-lt"/>
               </a:rPr>
               <a:t>Lean:</a:t>
             </a:r>
             <a:r>
-              <a:rPr lang="en-US" dirty="0">
+              <a:rPr lang="en-US">
                 <a:ea typeface="+mn-lt"/>
                 <a:cs typeface="+mn-lt"/>
               </a:rPr>
@@ -5150,7 +6096,7 @@
               <a:t>Processo</a:t>
             </a:r>
             <a:r>
-              <a:rPr lang="en-US" dirty="0">
+              <a:rPr lang="en-US">
                 <a:ea typeface="+mn-lt"/>
                 <a:cs typeface="+mn-lt"/>
               </a:rPr>
@@ -5161,10 +6107,10 @@
                 <a:ea typeface="+mn-lt"/>
                 <a:cs typeface="+mn-lt"/>
               </a:rPr>
-              <a:t>seguranca</a:t>
-            </a:r>
-            <a:r>
-              <a:rPr lang="en-US" dirty="0">
+              <a:t>segurança</a:t>
+            </a:r>
+            <a:r>
+              <a:rPr lang="en-US">
                 <a:ea typeface="+mn-lt"/>
                 <a:cs typeface="+mn-lt"/>
               </a:rPr>
@@ -5185,14 +6131,14 @@
               <a:buChar char="o"/>
             </a:pPr>
             <a:r>
-              <a:rPr lang="en-US" b="1" dirty="0">
+              <a:rPr lang="en-US" b="1">
                 <a:ea typeface="+mn-lt"/>
                 <a:cs typeface="+mn-lt"/>
               </a:rPr>
               <a:t>Measurement:</a:t>
             </a:r>
             <a:r>
-              <a:rPr lang="en-US" dirty="0">
+              <a:rPr lang="en-US">
                 <a:ea typeface="+mn-lt"/>
                 <a:cs typeface="+mn-lt"/>
               </a:rPr>
@@ -5203,14 +6149,14 @@
                 <a:ea typeface="+mn-lt"/>
                 <a:cs typeface="+mn-lt"/>
               </a:rPr>
-              <a:t>Mensurar</a:t>
-            </a:r>
-            <a:r>
-              <a:rPr lang="en-US" dirty="0">
-                <a:ea typeface="+mn-lt"/>
-                <a:cs typeface="+mn-lt"/>
-              </a:rPr>
-              <a:t> e </a:t>
+              <a:t>Medir</a:t>
+            </a:r>
+            <a:r>
+              <a:rPr lang="en-US">
+                <a:ea typeface="+mn-lt"/>
+                <a:cs typeface="+mn-lt"/>
+              </a:rPr>
+              <a:t> e </a:t>
             </a:r>
             <a:r>
               <a:rPr lang="en-US" err="1">
@@ -5220,7 +6166,7 @@
               <a:t>melhorar</a:t>
             </a:r>
             <a:r>
-              <a:rPr lang="en-US" dirty="0">
+              <a:rPr lang="en-US">
                 <a:ea typeface="+mn-lt"/>
                 <a:cs typeface="+mn-lt"/>
               </a:rPr>
@@ -5234,7 +6180,7 @@
               <a:t>os</a:t>
             </a:r>
             <a:r>
-              <a:rPr lang="en-US" dirty="0">
+              <a:rPr lang="en-US">
                 <a:ea typeface="+mn-lt"/>
                 <a:cs typeface="+mn-lt"/>
               </a:rPr>
@@ -5248,7 +6194,7 @@
               <a:t>controlos</a:t>
             </a:r>
             <a:r>
-              <a:rPr lang="en-US" dirty="0">
+              <a:rPr lang="en-US">
                 <a:ea typeface="+mn-lt"/>
                 <a:cs typeface="+mn-lt"/>
               </a:rPr>
@@ -5259,9 +6205,9 @@
                 <a:ea typeface="+mn-lt"/>
                 <a:cs typeface="+mn-lt"/>
               </a:rPr>
-              <a:t>seguranca</a:t>
-            </a:r>
-            <a:endParaRPr lang="en-US"/>
+              <a:t>segurança</a:t>
+            </a:r>
+            <a:endParaRPr lang="en-US" err="1"/>
           </a:p>
           <a:p>
             <a:pPr lvl="1">
@@ -5269,14 +6215,14 @@
               <a:buChar char="o"/>
             </a:pPr>
             <a:r>
-              <a:rPr lang="en-US" b="1" dirty="0">
+              <a:rPr lang="en-US" b="1">
                 <a:ea typeface="+mn-lt"/>
                 <a:cs typeface="+mn-lt"/>
               </a:rPr>
               <a:t>Sharing:</a:t>
             </a:r>
             <a:r>
-              <a:rPr lang="en-US" dirty="0">
+              <a:rPr lang="en-US">
                 <a:ea typeface="+mn-lt"/>
                 <a:cs typeface="+mn-lt"/>
               </a:rPr>
@@ -5290,7 +6236,7 @@
               <a:t>Compartilhar</a:t>
             </a:r>
             <a:r>
-              <a:rPr lang="en-US" dirty="0">
+              <a:rPr lang="en-US">
                 <a:ea typeface="+mn-lt"/>
                 <a:cs typeface="+mn-lt"/>
               </a:rPr>
@@ -5304,7 +6250,7 @@
               <a:t>conhecimento</a:t>
             </a:r>
             <a:r>
-              <a:rPr lang="en-US" dirty="0">
+              <a:rPr lang="en-US">
                 <a:ea typeface="+mn-lt"/>
                 <a:cs typeface="+mn-lt"/>
               </a:rPr>
@@ -5318,7 +6264,7 @@
               <a:t>outras</a:t>
             </a:r>
             <a:r>
-              <a:rPr lang="en-US" dirty="0">
+              <a:rPr lang="en-US">
                 <a:ea typeface="+mn-lt"/>
                 <a:cs typeface="+mn-lt"/>
               </a:rPr>
@@ -5337,7 +6283,7 @@
             <a:pPr marL="0" indent="0">
               <a:buNone/>
             </a:pPr>
-            <a:endParaRPr lang="en-US" dirty="0">
+            <a:endParaRPr lang="en-US">
               <a:ea typeface="+mn-lt"/>
               <a:cs typeface="+mn-lt"/>
             </a:endParaRPr>
@@ -5347,156 +6293,156 @@
               <a:buNone/>
             </a:pPr>
             <a:r>
-              <a:rPr lang="en-US" dirty="0">
+              <a:rPr lang="en-US">
                 <a:ea typeface="+mn-lt"/>
                 <a:cs typeface="+mn-lt"/>
               </a:rPr>
               <a:t>O </a:t>
             </a:r>
             <a:r>
-              <a:rPr lang="en-US" dirty="0" err="1">
+              <a:rPr lang="en-US" err="1">
                 <a:ea typeface="+mn-lt"/>
                 <a:cs typeface="+mn-lt"/>
               </a:rPr>
               <a:t>objetivo</a:t>
             </a:r>
             <a:r>
-              <a:rPr lang="en-US" dirty="0">
-                <a:ea typeface="+mn-lt"/>
-                <a:cs typeface="+mn-lt"/>
-              </a:rPr>
-              <a:t> e </a:t>
-            </a:r>
-            <a:r>
-              <a:rPr lang="en-US" dirty="0" err="1">
+              <a:rPr lang="en-US">
+                <a:ea typeface="+mn-lt"/>
+                <a:cs typeface="+mn-lt"/>
+              </a:rPr>
+              <a:t> é </a:t>
+            </a:r>
+            <a:r>
+              <a:rPr lang="en-US" err="1">
                 <a:ea typeface="+mn-lt"/>
                 <a:cs typeface="+mn-lt"/>
               </a:rPr>
               <a:t>ter</a:t>
             </a:r>
             <a:r>
-              <a:rPr lang="en-US" dirty="0">
+              <a:rPr lang="en-US">
                 <a:ea typeface="+mn-lt"/>
                 <a:cs typeface="+mn-lt"/>
               </a:rPr>
               <a:t> um </a:t>
             </a:r>
             <a:r>
-              <a:rPr lang="en-US" dirty="0" err="1">
+              <a:rPr lang="en-US" err="1">
                 <a:ea typeface="+mn-lt"/>
                 <a:cs typeface="+mn-lt"/>
               </a:rPr>
               <a:t>processo</a:t>
             </a:r>
             <a:r>
-              <a:rPr lang="en-US" dirty="0">
+              <a:rPr lang="en-US">
                 <a:ea typeface="+mn-lt"/>
                 <a:cs typeface="+mn-lt"/>
               </a:rPr>
               <a:t> </a:t>
             </a:r>
             <a:r>
-              <a:rPr lang="en-US" dirty="0" err="1">
-                <a:ea typeface="+mn-lt"/>
-                <a:cs typeface="+mn-lt"/>
-              </a:rPr>
-              <a:t>rapido</a:t>
-            </a:r>
-            <a:r>
-              <a:rPr lang="en-US" dirty="0">
+              <a:rPr lang="en-US" err="1">
+                <a:ea typeface="+mn-lt"/>
+                <a:cs typeface="+mn-lt"/>
+              </a:rPr>
+              <a:t>rápido</a:t>
+            </a:r>
+            <a:r>
+              <a:rPr lang="en-US">
                 <a:ea typeface="+mn-lt"/>
                 <a:cs typeface="+mn-lt"/>
               </a:rPr>
               <a:t> e </a:t>
             </a:r>
             <a:r>
-              <a:rPr lang="en-US" dirty="0" err="1">
+              <a:rPr lang="en-US" err="1">
                 <a:ea typeface="+mn-lt"/>
                 <a:cs typeface="+mn-lt"/>
               </a:rPr>
               <a:t>eficiente</a:t>
             </a:r>
             <a:r>
-              <a:rPr lang="en-US" dirty="0">
+              <a:rPr lang="en-US">
                 <a:ea typeface="+mn-lt"/>
                 <a:cs typeface="+mn-lt"/>
               </a:rPr>
               <a:t> que </a:t>
             </a:r>
             <a:r>
-              <a:rPr lang="en-US" dirty="0" err="1">
+              <a:rPr lang="en-US" err="1">
                 <a:ea typeface="+mn-lt"/>
                 <a:cs typeface="+mn-lt"/>
               </a:rPr>
               <a:t>entregue</a:t>
             </a:r>
             <a:r>
-              <a:rPr lang="en-US" dirty="0">
+              <a:rPr lang="en-US">
                 <a:ea typeface="+mn-lt"/>
                 <a:cs typeface="+mn-lt"/>
               </a:rPr>
               <a:t> um software </a:t>
             </a:r>
             <a:r>
-              <a:rPr lang="en-US" dirty="0" err="1">
+              <a:rPr lang="en-US" err="1">
                 <a:ea typeface="+mn-lt"/>
                 <a:cs typeface="+mn-lt"/>
               </a:rPr>
               <a:t>seguro</a:t>
             </a:r>
             <a:r>
-              <a:rPr lang="en-US" dirty="0">
+              <a:rPr lang="en-US">
                 <a:ea typeface="+mn-lt"/>
                 <a:cs typeface="+mn-lt"/>
               </a:rPr>
               <a:t> para </a:t>
             </a:r>
             <a:r>
-              <a:rPr lang="en-US" dirty="0" err="1">
-                <a:ea typeface="+mn-lt"/>
-                <a:cs typeface="+mn-lt"/>
-              </a:rPr>
-              <a:t>utilizacao</a:t>
-            </a:r>
-            <a:r>
-              <a:rPr lang="en-US" dirty="0">
+              <a:rPr lang="en-US" err="1">
+                <a:ea typeface="+mn-lt"/>
+                <a:cs typeface="+mn-lt"/>
+              </a:rPr>
+              <a:t>utilização</a:t>
+            </a:r>
+            <a:r>
+              <a:rPr lang="en-US">
                 <a:ea typeface="+mn-lt"/>
                 <a:cs typeface="+mn-lt"/>
               </a:rPr>
               <a:t> dos </a:t>
             </a:r>
             <a:r>
-              <a:rPr lang="en-US" dirty="0" err="1">
-                <a:ea typeface="+mn-lt"/>
-                <a:cs typeface="+mn-lt"/>
-              </a:rPr>
-              <a:t>usuarios</a:t>
-            </a:r>
-            <a:r>
-              <a:rPr lang="en-US" dirty="0">
-                <a:ea typeface="+mn-lt"/>
-                <a:cs typeface="+mn-lt"/>
-              </a:rPr>
-              <a:t> </a:t>
-            </a:r>
-            <a:r>
-              <a:rPr lang="en-US" dirty="0" err="1">
+              <a:rPr lang="en-US" err="1">
+                <a:ea typeface="+mn-lt"/>
+                <a:cs typeface="+mn-lt"/>
+              </a:rPr>
+              <a:t>utilizadores</a:t>
+            </a:r>
+            <a:r>
+              <a:rPr lang="en-US">
+                <a:ea typeface="+mn-lt"/>
+                <a:cs typeface="+mn-lt"/>
+              </a:rPr>
+              <a:t>  </a:t>
+            </a:r>
+            <a:r>
+              <a:rPr lang="en-US" err="1">
                 <a:ea typeface="+mn-lt"/>
                 <a:cs typeface="+mn-lt"/>
               </a:rPr>
               <a:t>finais</a:t>
             </a:r>
             <a:r>
-              <a:rPr lang="en-US" dirty="0">
+              <a:rPr lang="en-US">
                 <a:ea typeface="+mn-lt"/>
                 <a:cs typeface="+mn-lt"/>
               </a:rPr>
               <a:t>.</a:t>
             </a:r>
-            <a:endParaRPr lang="en-US" dirty="0"/>
-          </a:p>
-          <a:p>
-            <a:endParaRPr lang="en-US" dirty="0"/>
+            <a:endParaRPr lang="en-US"/>
+          </a:p>
+          <a:p>
+            <a:endParaRPr lang="en-US"/>
           </a:p>
         </p:txBody>
       </p:sp>
@@ -5552,17 +6498,18 @@
           <a:lstStyle/>
           <a:p>
             <a:r>
-              <a:rPr lang="en-US" dirty="0" err="1"/>
-              <a:t>Importancia</a:t>
-            </a:r>
-            <a:r>
-              <a:rPr lang="en-US" dirty="0"/>
+              <a:rPr lang="en-US" err="1"/>
+              <a:t>Importância</a:t>
+            </a:r>
+            <a:r>
+              <a:rPr lang="en-US"/>
               <a:t> do </a:t>
             </a:r>
             <a:r>
-              <a:rPr lang="en-US" dirty="0" err="1"/>
+              <a:rPr lang="en-US" err="1"/>
               <a:t>DevSecOps</a:t>
             </a:r>
+            <a:endParaRPr lang="en-US"/>
           </a:p>
         </p:txBody>
       </p:sp>
@@ -5590,29 +6537,30 @@
           <a:lstStyle/>
           <a:p>
             <a:r>
-              <a:rPr lang="en-US" dirty="0"/>
+              <a:rPr lang="en-US"/>
               <a:t>Crescente </a:t>
             </a:r>
             <a:r>
-              <a:rPr lang="en-US" dirty="0" err="1"/>
-              <a:t>numero</a:t>
-            </a:r>
-            <a:r>
-              <a:rPr lang="en-US" dirty="0"/>
+              <a:rPr lang="en-US" err="1"/>
+              <a:t>número</a:t>
+            </a:r>
+            <a:r>
+              <a:rPr lang="en-US"/>
               <a:t> de </a:t>
             </a:r>
             <a:r>
-              <a:rPr lang="en-US" dirty="0" err="1"/>
-              <a:t>ameacas</a:t>
-            </a:r>
-            <a:r>
-              <a:rPr lang="en-US" dirty="0"/>
+              <a:rPr lang="en-US" err="1"/>
+              <a:t>ameaças</a:t>
+            </a:r>
+            <a:r>
+              <a:rPr lang="en-US"/>
               <a:t> e </a:t>
             </a:r>
             <a:r>
-              <a:rPr lang="en-US" dirty="0" err="1"/>
+              <a:rPr lang="en-US" err="1"/>
               <a:t>ataques</a:t>
             </a:r>
+            <a:endParaRPr lang="en-US"/>
           </a:p>
           <a:p>
             <a:r>
@@ -5620,73 +6568,113 @@
               <a:t>Custo alto de </a:t>
             </a:r>
             <a:r>
-              <a:rPr lang="en-US" dirty="0" err="1"/>
-              <a:t>correcao</a:t>
-            </a:r>
-            <a:r>
-              <a:rPr lang="en-US" dirty="0"/>
+              <a:rPr lang="en-US" err="1"/>
+              <a:t>correção</a:t>
+            </a:r>
+            <a:r>
+              <a:rPr lang="en-US"/>
               <a:t> de </a:t>
             </a:r>
             <a:r>
-              <a:rPr lang="en-US" dirty="0" err="1"/>
+              <a:rPr lang="en-US" err="1"/>
               <a:t>uma</a:t>
             </a:r>
             <a:r>
-              <a:rPr lang="en-US" dirty="0"/>
-              <a:t> </a:t>
-            </a:r>
-            <a:r>
-              <a:rPr lang="en-US" dirty="0" err="1"/>
+              <a:rPr lang="en-US"/>
+              <a:t> </a:t>
+            </a:r>
+            <a:r>
+              <a:rPr lang="en-US" err="1"/>
               <a:t>vulnerabilidade</a:t>
             </a:r>
             <a:r>
-              <a:rPr lang="en-US" dirty="0"/>
-              <a:t> </a:t>
-            </a:r>
-            <a:r>
-              <a:rPr lang="en-US" dirty="0" err="1"/>
+              <a:rPr lang="en-US"/>
+              <a:t> </a:t>
+            </a:r>
+            <a:r>
+              <a:rPr lang="en-US" err="1"/>
               <a:t>em</a:t>
             </a:r>
             <a:r>
-              <a:rPr lang="en-US" dirty="0"/>
-              <a:t> </a:t>
-            </a:r>
-            <a:r>
-              <a:rPr lang="en-US" dirty="0" err="1"/>
-              <a:t>producao</a:t>
-            </a:r>
-            <a:endParaRPr lang="en-US" dirty="0"/>
-          </a:p>
-          <a:p>
-            <a:r>
-              <a:rPr lang="en-US"/>
-              <a:t>Compliance e regulamentacoes</a:t>
-            </a:r>
-            <a:endParaRPr lang="en-US" dirty="0"/>
-          </a:p>
-          <a:p>
-            <a:r>
-              <a:rPr lang="en-US"/>
-              <a:t>Entrega rapida de software seguro</a:t>
-            </a:r>
-            <a:endParaRPr lang="en-US" dirty="0"/>
-          </a:p>
-          <a:p>
-            <a:r>
-              <a:rPr lang="en-US"/>
-              <a:t>Mais-valia do produto</a:t>
-            </a:r>
-            <a:endParaRPr lang="en-US" dirty="0"/>
-          </a:p>
-          <a:p>
-            <a:r>
-              <a:rPr lang="en-US"/>
-              <a:t>Seguranca compartilhada entre equipas</a:t>
-            </a:r>
-            <a:endParaRPr lang="en-US" dirty="0"/>
-          </a:p>
-          <a:p>
-            <a:endParaRPr lang="en-US" dirty="0"/>
+              <a:rPr lang="en-US"/>
+              <a:t> </a:t>
+            </a:r>
+            <a:r>
+              <a:rPr lang="en-US" err="1"/>
+              <a:t>produção</a:t>
+            </a:r>
+            <a:endParaRPr lang="en-US"/>
+          </a:p>
+          <a:p>
+            <a:r>
+              <a:rPr lang="en-US"/>
+              <a:t>Compliance e </a:t>
+            </a:r>
+            <a:r>
+              <a:rPr lang="en-US" err="1"/>
+              <a:t>regulamentações</a:t>
+            </a:r>
+            <a:endParaRPr lang="en-US"/>
+          </a:p>
+          <a:p>
+            <a:r>
+              <a:rPr lang="en-US"/>
+              <a:t>Entrega </a:t>
+            </a:r>
+            <a:r>
+              <a:rPr lang="en-US" err="1"/>
+              <a:t>rápida</a:t>
+            </a:r>
+            <a:r>
+              <a:rPr lang="en-US"/>
+              <a:t> de software </a:t>
+            </a:r>
+            <a:r>
+              <a:rPr lang="en-US" err="1"/>
+              <a:t>seguro</a:t>
+            </a:r>
+            <a:endParaRPr lang="en-US"/>
+          </a:p>
+          <a:p>
+            <a:r>
+              <a:rPr lang="en-US"/>
+              <a:t>Mais-</a:t>
+            </a:r>
+            <a:r>
+              <a:rPr lang="en-US" err="1"/>
+              <a:t>valia</a:t>
+            </a:r>
+            <a:r>
+              <a:rPr lang="en-US"/>
+              <a:t> do </a:t>
+            </a:r>
+            <a:r>
+              <a:rPr lang="en-US" err="1"/>
+              <a:t>produto</a:t>
+            </a:r>
+            <a:endParaRPr lang="en-US"/>
+          </a:p>
+          <a:p>
+            <a:r>
+              <a:rPr lang="en-US"/>
+              <a:t>Segurança </a:t>
+            </a:r>
+            <a:r>
+              <a:rPr lang="en-US" err="1"/>
+              <a:t>compartilhada</a:t>
+            </a:r>
+            <a:r>
+              <a:rPr lang="en-US"/>
+              <a:t> entre </a:t>
+            </a:r>
+            <a:r>
+              <a:rPr lang="en-US" err="1"/>
+              <a:t>equipas</a:t>
+            </a:r>
+            <a:endParaRPr lang="en-US"/>
+          </a:p>
+          <a:p>
+            <a:endParaRPr lang="en-US"/>
           </a:p>
         </p:txBody>
       </p:sp>
@@ -5742,9 +6730,18 @@
           <a:lstStyle/>
           <a:p>
             <a:r>
-              <a:rPr lang="en-US"/>
-              <a:t>Principios de DevSecOps</a:t>
-            </a:r>
+              <a:rPr lang="en-US" err="1"/>
+              <a:t>Princípios</a:t>
+            </a:r>
+            <a:r>
+              <a:rPr lang="en-US"/>
+              <a:t> de </a:t>
+            </a:r>
+            <a:r>
+              <a:rPr lang="en-US" err="1"/>
+              <a:t>DevSecOps</a:t>
+            </a:r>
+            <a:endParaRPr lang="en-US"/>
           </a:p>
         </p:txBody>
       </p:sp>
@@ -5772,28 +6769,65 @@
           <a:lstStyle/>
           <a:p>
             <a:r>
-              <a:rPr lang="en-US"/>
-              <a:t>Automacoes de tarefas</a:t>
-            </a:r>
-          </a:p>
-          <a:p>
-            <a:r>
-              <a:rPr lang="en-US"/>
-              <a:t>Colaboracao e comunicacao</a:t>
-            </a:r>
-          </a:p>
-          <a:p>
-            <a:r>
-              <a:rPr lang="en-US"/>
-              <a:t>Visibilidade do ambiente e monitorizacao</a:t>
-            </a:r>
-          </a:p>
-          <a:p>
-            <a:r>
-              <a:rPr lang="en-US"/>
-              <a:t>Educacao e treinamento</a:t>
-            </a:r>
-            <a:endParaRPr lang="en-US" dirty="0"/>
+              <a:rPr lang="en-US" err="1"/>
+              <a:t>Automações</a:t>
+            </a:r>
+            <a:r>
+              <a:rPr lang="en-US"/>
+              <a:t> de </a:t>
+            </a:r>
+            <a:r>
+              <a:rPr lang="en-US" err="1"/>
+              <a:t>tarefas</a:t>
+            </a:r>
+            <a:endParaRPr lang="en-US"/>
+          </a:p>
+          <a:p>
+            <a:r>
+              <a:rPr lang="en-US" err="1"/>
+              <a:t>Colaboração</a:t>
+            </a:r>
+            <a:r>
+              <a:rPr lang="en-US"/>
+              <a:t> e </a:t>
+            </a:r>
+            <a:r>
+              <a:rPr lang="en-US" err="1"/>
+              <a:t>comunicação</a:t>
+            </a:r>
+          </a:p>
+          <a:p>
+            <a:r>
+              <a:rPr lang="en-US"/>
+              <a:t>Visibilidade do </a:t>
+            </a:r>
+            <a:r>
+              <a:rPr lang="en-US" err="1"/>
+              <a:t>ambiente</a:t>
+            </a:r>
+            <a:r>
+              <a:rPr lang="en-US"/>
+              <a:t> e </a:t>
+            </a:r>
+            <a:r>
+              <a:rPr lang="en-US" err="1"/>
+              <a:t>monitorização</a:t>
+            </a:r>
+          </a:p>
+          <a:p>
+            <a:r>
+              <a:rPr lang="en-US" err="1"/>
+              <a:t>Educação</a:t>
+            </a:r>
+            <a:r>
+              <a:rPr lang="en-US"/>
+              <a:t> e </a:t>
+            </a:r>
+            <a:r>
+              <a:rPr lang="en-US" err="1"/>
+              <a:t>treinamento</a:t>
+            </a:r>
+            <a:endParaRPr lang="en-US"/>
           </a:p>
         </p:txBody>
       </p:sp>
@@ -5849,9 +6883,18 @@
           <a:lstStyle/>
           <a:p>
             <a:r>
-              <a:rPr lang="en-US"/>
-              <a:t>Comecando com DevSecOps</a:t>
-            </a:r>
+              <a:rPr lang="en-US" err="1"/>
+              <a:t>Começando</a:t>
+            </a:r>
+            <a:r>
+              <a:rPr lang="en-US"/>
+              <a:t> com </a:t>
+            </a:r>
+            <a:r>
+              <a:rPr lang="en-US" err="1"/>
+              <a:t>DevSecOps</a:t>
+            </a:r>
+            <a:endParaRPr lang="en-US"/>
           </a:p>
         </p:txBody>
       </p:sp>
@@ -5880,8 +6923,61 @@
           <a:p>
             <a:r>
               <a:rPr lang="en-US"/>
-              <a:t>1 – Faca uma auditoria de como sua empresa implementa DevSecOps</a:t>
-            </a:r>
+              <a:t>1 – </a:t>
+            </a:r>
+            <a:r>
+              <a:rPr lang="en-US" err="1"/>
+              <a:t>Faça</a:t>
+            </a:r>
+            <a:r>
+              <a:rPr lang="en-US"/>
+              <a:t> </a:t>
+            </a:r>
+            <a:r>
+              <a:rPr lang="en-US" err="1"/>
+              <a:t>uma</a:t>
+            </a:r>
+            <a:r>
+              <a:rPr lang="en-US"/>
+              <a:t> auditoria de </a:t>
+            </a:r>
+            <a:r>
+              <a:rPr lang="en-US" err="1"/>
+              <a:t>como</a:t>
+            </a:r>
+            <a:r>
+              <a:rPr lang="en-US"/>
+              <a:t> </a:t>
+            </a:r>
+            <a:r>
+              <a:rPr lang="en-US" err="1"/>
+              <a:t>sua</a:t>
+            </a:r>
+            <a:r>
+              <a:rPr lang="en-US"/>
+              <a:t> </a:t>
+            </a:r>
+            <a:r>
+              <a:rPr lang="en-US" err="1"/>
+              <a:t>empresa</a:t>
+            </a:r>
+            <a:r>
+              <a:rPr lang="en-US"/>
+              <a:t> </a:t>
+            </a:r>
+            <a:r>
+              <a:rPr lang="en-US" err="1"/>
+              <a:t>implementa</a:t>
+            </a:r>
+            <a:r>
+              <a:rPr lang="en-US"/>
+              <a:t> </a:t>
+            </a:r>
+            <a:r>
+              <a:rPr lang="en-US" err="1"/>
+              <a:t>DevSecOps</a:t>
+            </a:r>
+            <a:endParaRPr lang="en-US"/>
           </a:p>
           <a:p>
             <a:pPr lvl="1">
@@ -5889,8 +6985,84 @@
               <a:buChar char="o"/>
             </a:pPr>
             <a:r>
-              <a:rPr lang="en-US"/>
-              <a:t>Identifique se ha ou nao ha controlos de seguranca ja implementados (praticas, ferramentas e oportunidades de melhoria)</a:t>
+              <a:rPr lang="en-US" err="1"/>
+              <a:t>Identifique</a:t>
+            </a:r>
+            <a:r>
+              <a:rPr lang="en-US"/>
+              <a:t> se </a:t>
+            </a:r>
+            <a:r>
+              <a:rPr lang="en-US" err="1"/>
+              <a:t>há</a:t>
+            </a:r>
+            <a:r>
+              <a:rPr lang="en-US"/>
+              <a:t> </a:t>
+            </a:r>
+            <a:r>
+              <a:rPr lang="en-US" err="1"/>
+              <a:t>ou</a:t>
+            </a:r>
+            <a:r>
+              <a:rPr lang="en-US"/>
+              <a:t> nao </a:t>
+            </a:r>
+            <a:r>
+              <a:rPr lang="en-US" err="1"/>
+              <a:t>há</a:t>
+            </a:r>
+            <a:r>
+              <a:rPr lang="en-US"/>
+              <a:t> </a:t>
+            </a:r>
+            <a:r>
+              <a:rPr lang="en-US" err="1"/>
+              <a:t>controlos</a:t>
+            </a:r>
+            <a:r>
+              <a:rPr lang="en-US"/>
+              <a:t> de </a:t>
+            </a:r>
+            <a:r>
+              <a:rPr lang="en-US" err="1"/>
+              <a:t>segurança</a:t>
+            </a:r>
+            <a:r>
+              <a:rPr lang="en-US"/>
+              <a:t> ja </a:t>
+            </a:r>
+            <a:r>
+              <a:rPr lang="en-US" err="1"/>
+              <a:t>implementados</a:t>
+            </a:r>
+            <a:r>
+              <a:rPr lang="en-US"/>
+              <a:t> (</a:t>
+            </a:r>
+            <a:r>
+              <a:rPr lang="en-US" err="1"/>
+              <a:t>práticas</a:t>
+            </a:r>
+            <a:r>
+              <a:rPr lang="en-US"/>
+              <a:t>, ferramentas e </a:t>
+            </a:r>
+            <a:r>
+              <a:rPr lang="en-US" err="1"/>
+              <a:t>oportunidades</a:t>
+            </a:r>
+            <a:r>
+              <a:rPr lang="en-US"/>
+              <a:t> de </a:t>
+            </a:r>
+            <a:r>
+              <a:rPr lang="en-US" err="1"/>
+              <a:t>melhoria</a:t>
+            </a:r>
+            <a:r>
+              <a:rPr lang="en-US"/>
+              <a:t>)</a:t>
             </a:r>
           </a:p>
           <a:p>
@@ -5899,23 +7071,195 @@
               <a:buChar char="o"/>
             </a:pPr>
             <a:r>
-              <a:rPr lang="en-US"/>
-              <a:t>Entenda como as aplicacoes sao desenvolvidas e colocadas em producao e o que seria necessario para implemetar/melhorar esse processo</a:t>
-            </a:r>
+              <a:rPr lang="en-US" err="1"/>
+              <a:t>Entenda</a:t>
+            </a:r>
+            <a:r>
+              <a:rPr lang="en-US"/>
+              <a:t> </a:t>
+            </a:r>
+            <a:r>
+              <a:rPr lang="en-US" err="1"/>
+              <a:t>como</a:t>
+            </a:r>
+            <a:r>
+              <a:rPr lang="en-US"/>
+              <a:t> as </a:t>
+            </a:r>
+            <a:r>
+              <a:rPr lang="en-US" err="1"/>
+              <a:t>aplicações</a:t>
+            </a:r>
+            <a:r>
+              <a:rPr lang="en-US"/>
+              <a:t> </a:t>
+            </a:r>
+            <a:r>
+              <a:rPr lang="en-US" err="1"/>
+              <a:t>são</a:t>
+            </a:r>
+            <a:r>
+              <a:rPr lang="en-US"/>
+              <a:t> </a:t>
+            </a:r>
+            <a:r>
+              <a:rPr lang="en-US" err="1"/>
+              <a:t>desenvolvidas</a:t>
+            </a:r>
+            <a:r>
+              <a:rPr lang="en-US"/>
+              <a:t> e </a:t>
+            </a:r>
+            <a:r>
+              <a:rPr lang="en-US" err="1"/>
+              <a:t>colocadas</a:t>
+            </a:r>
+            <a:r>
+              <a:rPr lang="en-US"/>
+              <a:t> </a:t>
+            </a:r>
+            <a:r>
+              <a:rPr lang="en-US" err="1"/>
+              <a:t>em</a:t>
+            </a:r>
+            <a:r>
+              <a:rPr lang="en-US"/>
+              <a:t> </a:t>
+            </a:r>
+            <a:r>
+              <a:rPr lang="en-US" err="1"/>
+              <a:t>produção</a:t>
+            </a:r>
+            <a:r>
+              <a:rPr lang="en-US"/>
+              <a:t> e o que seria </a:t>
+            </a:r>
+            <a:r>
+              <a:rPr lang="en-US" err="1"/>
+              <a:t>necessário</a:t>
+            </a:r>
+            <a:r>
+              <a:rPr lang="en-US"/>
+              <a:t> para </a:t>
+            </a:r>
+            <a:r>
+              <a:rPr lang="en-US" err="1"/>
+              <a:t>implementar</a:t>
+            </a:r>
+            <a:r>
+              <a:rPr lang="en-US"/>
+              <a:t>/</a:t>
+            </a:r>
+            <a:r>
+              <a:rPr lang="en-US" err="1"/>
+              <a:t>melhorar</a:t>
+            </a:r>
+            <a:r>
+              <a:rPr lang="en-US"/>
+              <a:t> </a:t>
+            </a:r>
+            <a:r>
+              <a:rPr lang="en-US" err="1"/>
+              <a:t>esse</a:t>
+            </a:r>
+            <a:r>
+              <a:rPr lang="en-US"/>
+              <a:t> </a:t>
+            </a:r>
+            <a:r>
+              <a:rPr lang="en-US" err="1"/>
+              <a:t>processo</a:t>
+            </a:r>
+            <a:endParaRPr lang="en-US"/>
           </a:p>
           <a:p>
             <a:pPr marL="0" indent="0">
               <a:buNone/>
             </a:pPr>
             <a:r>
-              <a:rPr lang="en-US" dirty="0"/>
-              <a:t>Isso ajudara a entender o cenario atual e tracar objetivos a curto, </a:t>
-            </a:r>
-            <a:r>
-              <a:rPr lang="en-US"/>
-              <a:t>medio e longo prazo.</a:t>
-            </a:r>
-            <a:endParaRPr lang="en-US" dirty="0"/>
+              <a:rPr lang="en-US"/>
+              <a:t>Isso </a:t>
+            </a:r>
+            <a:r>
+              <a:rPr lang="en-US" err="1"/>
+              <a:t>ajudará</a:t>
+            </a:r>
+            <a:r>
+              <a:rPr lang="en-US"/>
+              <a:t> a </a:t>
+            </a:r>
+            <a:r>
+              <a:rPr lang="en-US" err="1"/>
+              <a:t>entender</a:t>
+            </a:r>
+            <a:r>
+              <a:rPr lang="en-US"/>
+              <a:t> o </a:t>
+            </a:r>
+            <a:r>
+              <a:rPr lang="en-US" err="1"/>
+              <a:t>cenário</a:t>
+            </a:r>
+            <a:r>
+              <a:rPr lang="en-US"/>
+              <a:t> </a:t>
+            </a:r>
+            <a:r>
+              <a:rPr lang="en-US" err="1"/>
+              <a:t>atual</a:t>
+            </a:r>
+            <a:r>
+              <a:rPr lang="en-US"/>
+              <a:t> e </a:t>
+            </a:r>
+            <a:r>
+              <a:rPr lang="en-US" err="1"/>
+              <a:t>traçar</a:t>
+            </a:r>
+            <a:r>
+              <a:rPr lang="en-US"/>
+              <a:t> </a:t>
+            </a:r>
+            <a:r>
+              <a:rPr lang="en-US" err="1"/>
+              <a:t>objetivos</a:t>
+            </a:r>
+            <a:r>
+              <a:rPr lang="en-US"/>
+              <a:t> a </a:t>
+            </a:r>
+            <a:r>
+              <a:rPr lang="en-US" err="1"/>
+              <a:t>curto</a:t>
+            </a:r>
+            <a:r>
+              <a:rPr lang="en-US"/>
+              <a:t>, </a:t>
+            </a:r>
+            <a:r>
+              <a:rPr lang="en-US" err="1"/>
+              <a:t>médio</a:t>
+            </a:r>
+            <a:r>
+              <a:rPr lang="en-US"/>
+              <a:t> e </a:t>
+            </a:r>
+            <a:r>
+              <a:rPr lang="en-US" err="1"/>
+              <a:t>longo</a:t>
+            </a:r>
+            <a:r>
+              <a:rPr lang="en-US"/>
+              <a:t> </a:t>
+            </a:r>
+            <a:r>
+              <a:rPr lang="en-US" err="1"/>
+              <a:t>prazo</a:t>
+            </a:r>
+            <a:r>
+              <a:rPr lang="en-US"/>
+              <a:t>.</a:t>
+            </a:r>
           </a:p>
         </p:txBody>
       </p:sp>
@@ -5971,9 +7315,18 @@
           <a:lstStyle/>
           <a:p>
             <a:r>
-              <a:rPr lang="en-US"/>
-              <a:t>Comecando DevSecOps</a:t>
-            </a:r>
+              <a:rPr lang="en-US" err="1"/>
+              <a:t>Começando</a:t>
+            </a:r>
+            <a:r>
+              <a:rPr lang="en-US"/>
+              <a:t> </a:t>
+            </a:r>
+            <a:r>
+              <a:rPr lang="en-US" err="1"/>
+              <a:t>DevSecOps</a:t>
+            </a:r>
+            <a:endParaRPr lang="en-US"/>
           </a:p>
         </p:txBody>
       </p:sp>
@@ -6002,8 +7355,45 @@
           <a:p>
             <a:r>
               <a:rPr lang="en-US"/>
-              <a:t>2 – Comece aos poucos e va melhorando</a:t>
-            </a:r>
+              <a:t>2 – </a:t>
+            </a:r>
+            <a:r>
+              <a:rPr lang="en-US" err="1"/>
+              <a:t>Comece</a:t>
+            </a:r>
+            <a:r>
+              <a:rPr lang="en-US"/>
+              <a:t> </a:t>
+            </a:r>
+            <a:r>
+              <a:rPr lang="en-US" err="1"/>
+              <a:t>aos</a:t>
+            </a:r>
+            <a:r>
+              <a:rPr lang="en-US"/>
+              <a:t> </a:t>
+            </a:r>
+            <a:r>
+              <a:rPr lang="en-US" err="1"/>
+              <a:t>poucos</a:t>
+            </a:r>
+            <a:r>
+              <a:rPr lang="en-US"/>
+              <a:t> e </a:t>
+            </a:r>
+            <a:r>
+              <a:rPr lang="en-US" err="1"/>
+              <a:t>vá</a:t>
+            </a:r>
+            <a:r>
+              <a:rPr lang="en-US"/>
+              <a:t> </a:t>
+            </a:r>
+            <a:r>
+              <a:rPr lang="en-US" err="1"/>
+              <a:t>melhorando</a:t>
+            </a:r>
+            <a:endParaRPr lang="en-US"/>
           </a:p>
           <a:p>
             <a:pPr lvl="1">
@@ -6011,8 +7401,60 @@
               <a:buChar char="o"/>
             </a:pPr>
             <a:r>
-              <a:rPr lang="en-US"/>
-              <a:t>Implemente em pequenos projetos ou projetos pilotos </a:t>
+              <a:rPr lang="en-US" err="1"/>
+              <a:t>Implemente</a:t>
+            </a:r>
+            <a:r>
+              <a:rPr lang="en-US"/>
+              <a:t> </a:t>
+            </a:r>
+            <a:r>
+              <a:rPr lang="en-US" err="1"/>
+              <a:t>em</a:t>
+            </a:r>
+            <a:r>
+              <a:rPr lang="en-US"/>
+              <a:t> </a:t>
+            </a:r>
+            <a:r>
+              <a:rPr lang="en-US" err="1"/>
+              <a:t>pequenos</a:t>
+            </a:r>
+            <a:r>
+              <a:rPr lang="en-US"/>
+              <a:t> </a:t>
+            </a:r>
+            <a:r>
+              <a:rPr lang="en-US" err="1"/>
+              <a:t>projetos</a:t>
+            </a:r>
+            <a:r>
+              <a:rPr lang="en-US"/>
+              <a:t> </a:t>
+            </a:r>
+            <a:r>
+              <a:rPr lang="en-US" err="1"/>
+              <a:t>ou</a:t>
+            </a:r>
+            <a:r>
+              <a:rPr lang="en-US"/>
+              <a:t> </a:t>
+            </a:r>
+            <a:r>
+              <a:rPr lang="en-US" err="1"/>
+              <a:t>projetos</a:t>
+            </a:r>
+            <a:r>
+              <a:rPr lang="en-US"/>
+              <a:t> </a:t>
+            </a:r>
+            <a:r>
+              <a:rPr lang="en-US" err="1"/>
+              <a:t>pilotos</a:t>
+            </a:r>
+            <a:r>
+              <a:rPr lang="en-US"/>
+              <a:t> </a:t>
             </a:r>
           </a:p>
           <a:p>
@@ -6021,8 +7463,84 @@
               <a:buChar char="o"/>
             </a:pPr>
             <a:r>
-              <a:rPr lang="en-US"/>
-              <a:t>Foque em um ou dois controlos de seguranca, preferencialmente os que estao no comeco do SDLC</a:t>
+              <a:rPr lang="en-US" err="1"/>
+              <a:t>Foque</a:t>
+            </a:r>
+            <a:r>
+              <a:rPr lang="en-US"/>
+              <a:t> </a:t>
+            </a:r>
+            <a:r>
+              <a:rPr lang="en-US" err="1"/>
+              <a:t>em</a:t>
+            </a:r>
+            <a:r>
+              <a:rPr lang="en-US"/>
+              <a:t> um </a:t>
+            </a:r>
+            <a:r>
+              <a:rPr lang="en-US" err="1"/>
+              <a:t>ou</a:t>
+            </a:r>
+            <a:r>
+              <a:rPr lang="en-US"/>
+              <a:t> </a:t>
+            </a:r>
+            <a:r>
+              <a:rPr lang="en-US" err="1"/>
+              <a:t>dois</a:t>
+            </a:r>
+            <a:r>
+              <a:rPr lang="en-US"/>
+              <a:t> </a:t>
+            </a:r>
+            <a:r>
+              <a:rPr lang="en-US" err="1"/>
+              <a:t>controlos</a:t>
+            </a:r>
+            <a:r>
+              <a:rPr lang="en-US"/>
+              <a:t> de </a:t>
+            </a:r>
+            <a:r>
+              <a:rPr lang="en-US" err="1"/>
+              <a:t>segurança</a:t>
+            </a:r>
+            <a:r>
+              <a:rPr lang="en-US"/>
+              <a:t>, </a:t>
+            </a:r>
+            <a:r>
+              <a:rPr lang="en-US" err="1"/>
+              <a:t>preferencialmente</a:t>
+            </a:r>
+            <a:r>
+              <a:rPr lang="en-US"/>
+              <a:t> </a:t>
+            </a:r>
+            <a:r>
+              <a:rPr lang="en-US" err="1"/>
+              <a:t>os</a:t>
+            </a:r>
+            <a:r>
+              <a:rPr lang="en-US"/>
+              <a:t> que </a:t>
+            </a:r>
+            <a:r>
+              <a:rPr lang="en-US" err="1"/>
+              <a:t>estão</a:t>
+            </a:r>
+            <a:r>
+              <a:rPr lang="en-US"/>
+              <a:t> no </a:t>
+            </a:r>
+            <a:r>
+              <a:rPr lang="en-US" err="1"/>
+              <a:t>começo</a:t>
+            </a:r>
+            <a:r>
+              <a:rPr lang="en-US"/>
+              <a:t> do SDLC</a:t>
             </a:r>
           </a:p>
           <a:p>
@@ -6031,29 +7549,192 @@
               <a:buChar char="o"/>
             </a:pPr>
             <a:r>
-              <a:rPr lang="en-US"/>
-              <a:t>Aprenda com o processo o que pode ser melhorado e/ou adaptado e expanda para outros projetos</a:t>
+              <a:rPr lang="en-US" err="1"/>
+              <a:t>Aprenda</a:t>
+            </a:r>
+            <a:r>
+              <a:rPr lang="en-US"/>
+              <a:t> com o </a:t>
+            </a:r>
+            <a:r>
+              <a:rPr lang="en-US" err="1"/>
+              <a:t>processo</a:t>
+            </a:r>
+            <a:r>
+              <a:rPr lang="en-US"/>
+              <a:t> o que </a:t>
+            </a:r>
+            <a:r>
+              <a:rPr lang="en-US" err="1"/>
+              <a:t>pode</a:t>
+            </a:r>
+            <a:r>
+              <a:rPr lang="en-US"/>
+              <a:t> ser </a:t>
+            </a:r>
+            <a:r>
+              <a:rPr lang="en-US" err="1"/>
+              <a:t>melhorado</a:t>
+            </a:r>
+            <a:r>
+              <a:rPr lang="en-US"/>
+              <a:t> e/</a:t>
+            </a:r>
+            <a:r>
+              <a:rPr lang="en-US" err="1"/>
+              <a:t>ou</a:t>
+            </a:r>
+            <a:r>
+              <a:rPr lang="en-US"/>
+              <a:t> </a:t>
+            </a:r>
+            <a:r>
+              <a:rPr lang="en-US" err="1"/>
+              <a:t>adaptado</a:t>
+            </a:r>
+            <a:r>
+              <a:rPr lang="en-US"/>
+              <a:t> e </a:t>
+            </a:r>
+            <a:r>
+              <a:rPr lang="en-US" err="1"/>
+              <a:t>expanda</a:t>
+            </a:r>
+            <a:r>
+              <a:rPr lang="en-US"/>
+              <a:t> para outros </a:t>
+            </a:r>
+            <a:r>
+              <a:rPr lang="en-US" err="1"/>
+              <a:t>projetos</a:t>
             </a:r>
           </a:p>
           <a:p>
             <a:pPr marL="0" indent="0">
               <a:buNone/>
             </a:pPr>
-            <a:endParaRPr lang="en-US" dirty="0"/>
+            <a:endParaRPr lang="en-US"/>
           </a:p>
           <a:p>
             <a:pPr marL="0" indent="0">
               <a:buNone/>
             </a:pPr>
             <a:r>
-              <a:rPr lang="en-US" dirty="0"/>
-              <a:t>Com isso voce consegue iniciar a implementacao de DevSecOps aos poucos e expandir de maneira segura e assim, ganhar </a:t>
-            </a:r>
-            <a:r>
-              <a:rPr lang="en-US"/>
-              <a:t>maturidade de seguranca</a:t>
-            </a:r>
-            <a:endParaRPr lang="en-US" dirty="0"/>
+              <a:rPr lang="en-US"/>
+              <a:t>Com </a:t>
+            </a:r>
+            <a:r>
+              <a:rPr lang="en-US" err="1"/>
+              <a:t>isso</a:t>
+            </a:r>
+            <a:r>
+              <a:rPr lang="en-US"/>
+              <a:t> </a:t>
+            </a:r>
+            <a:r>
+              <a:rPr lang="en-US" err="1"/>
+              <a:t>você</a:t>
+            </a:r>
+            <a:r>
+              <a:rPr lang="en-US"/>
+              <a:t> </a:t>
+            </a:r>
+            <a:r>
+              <a:rPr lang="en-US" err="1"/>
+              <a:t>consegue</a:t>
+            </a:r>
+            <a:r>
+              <a:rPr lang="en-US"/>
+              <a:t> </a:t>
+            </a:r>
+            <a:r>
+              <a:rPr lang="en-US" err="1"/>
+              <a:t>iniciar</a:t>
+            </a:r>
+            <a:r>
+              <a:rPr lang="en-US"/>
+              <a:t> a </a:t>
+            </a:r>
+            <a:r>
+              <a:rPr lang="en-US" err="1"/>
+              <a:t>implementação</a:t>
+            </a:r>
+            <a:r>
+              <a:rPr lang="en-US"/>
+              <a:t> de </a:t>
+            </a:r>
+            <a:r>
+              <a:rPr lang="en-US" err="1"/>
+              <a:t>DevSecOps</a:t>
+            </a:r>
+            <a:r>
+              <a:rPr lang="en-US"/>
+              <a:t> </a:t>
+            </a:r>
+            <a:r>
+              <a:rPr lang="en-US" err="1"/>
+              <a:t>aos</a:t>
+            </a:r>
+            <a:r>
+              <a:rPr lang="en-US"/>
+              <a:t> </a:t>
+            </a:r>
+            <a:r>
+              <a:rPr lang="en-US" err="1"/>
+              <a:t>poucos</a:t>
+            </a:r>
+            <a:r>
+              <a:rPr lang="en-US"/>
+              <a:t> e </a:t>
+            </a:r>
+            <a:r>
+              <a:rPr lang="en-US" err="1"/>
+              <a:t>expandir</a:t>
+            </a:r>
+            <a:r>
+              <a:rPr lang="en-US"/>
+              <a:t> de </a:t>
+            </a:r>
+            <a:r>
+              <a:rPr lang="en-US" err="1"/>
+              <a:t>maneira</a:t>
+            </a:r>
+            <a:r>
+              <a:rPr lang="en-US"/>
+              <a:t> </a:t>
+            </a:r>
+            <a:r>
+              <a:rPr lang="en-US" err="1"/>
+              <a:t>segura</a:t>
+            </a:r>
+            <a:r>
+              <a:rPr lang="en-US"/>
+              <a:t> e </a:t>
+            </a:r>
+            <a:r>
+              <a:rPr lang="en-US" err="1"/>
+              <a:t>assim</a:t>
+            </a:r>
+            <a:r>
+              <a:rPr lang="en-US"/>
+              <a:t>, </a:t>
+            </a:r>
+            <a:r>
+              <a:rPr lang="en-US" err="1"/>
+              <a:t>ganhar</a:t>
+            </a:r>
+            <a:r>
+              <a:rPr lang="en-US"/>
+              <a:t> </a:t>
+            </a:r>
+            <a:r>
+              <a:rPr lang="en-US" err="1"/>
+              <a:t>maturidade</a:t>
+            </a:r>
+            <a:r>
+              <a:rPr lang="en-US"/>
+              <a:t> de segurança</a:t>
+            </a:r>
           </a:p>
         </p:txBody>
       </p:sp>
